--- a/i18n/fr/module01-03-initial-bipartition/slides.pptx
+++ b/i18n/fr/module01-03-initial-bipartition/slides.pptx
@@ -27,6 +27,14 @@
     <p:sldId id="275" r:id="rId27"/>
     <p:sldId id="276" r:id="rId28"/>
     <p:sldId id="277" r:id="rId29"/>
+    <p:sldId id="278" r:id="rId30"/>
+    <p:sldId id="279" r:id="rId31"/>
+    <p:sldId id="280" r:id="rId32"/>
+    <p:sldId id="281" r:id="rId33"/>
+    <p:sldId id="282" r:id="rId34"/>
+    <p:sldId id="283" r:id="rId35"/>
+    <p:sldId id="284" r:id="rId36"/>
+    <p:sldId id="285" r:id="rId37"/>
   </p:sldIdLst>
   <p:sldSz cx="12191695" cy="6858000" type="screen4x3"/>
   <p:notesSz cx="6858000" cy="9144000"/>
@@ -523,7 +531,7 @@
           <a:lstStyle/>
           <a:p>
             <a:r>
-              <a:t>Avant d'améliorer une coupe, il faut une première coupe. Cette première coupe s'appelle la bipartition initiale. Vous allez découvrir trois façons de la construire : aléatoire, gloutonne et par croissance. Vous verrez le même petit graphe obtenir une coupe de trois, ou une coupe de seize. Et vous apprendrez la bonne habitude qui règle ce problème : essayer plusieurs départs, et garder le meilleur.</a:t>
+              <a:t>Avant d'améliorer une coupe, il faut une première coupe, appelée la bipartition initiale. Vous allez découvrir trois façons de la construire : aléatoire, gloutonne et par croissance. Sur un même petit graphe, elles donnent des coupes de trois à seize. La bonne habitude qui règle ça : essayer plusieurs départs, garder le meilleur.</a:t>
             </a:r>
           </a:p>
         </p:txBody>
@@ -593,7 +601,7 @@
           <a:lstStyle/>
           <a:p>
             <a:r>
-              <a:t>Voyons maintenant jusqu'où peut aller la malchance. Avec la graine trois, le mélange donne B et D à un côté. A, C et E se retrouvent de l'autre. Additionnons la coupe, arête par arête. A–B cinq, B–C quatre, C–D deux et D–E cinq : seize au total. Les deux arêtes lourdes sont coupées, donc c'est la pire partition valide qui existe. Sur les seize graines essayées, seules trois donnent la meilleure coupe, trois.</a:t>
+              <a:t>La recette trois est la croissance : un côté s'étend depuis un nœud de départ, comme une goutte d'encre sur le papier. Partons de D. L'arête la plus lourde qui sort de D va vers E, donc E le rejoint. Deux cellules suffisent, donc le côté s'arrête. A, B et C forment l'autre côté : encore une coupe de trois.</a:t>
             </a:r>
           </a:p>
         </p:txBody>
@@ -663,7 +671,7 @@
           <a:lstStyle/>
           <a:p>
             <a:r>
-              <a:t>La croissance n'a pas de hasard, mais elle a un choix : le nœud de départ. Partons de A au lieu de D. L'arête la plus lourde qui sort de A va vers B, avec un poids de cinq, donc B rejoint A. Avec deux cellules, le côté est plein, et il s'arrête. C, D et E forment l'autre côté, donc A–C et B–C sont coupées. Un plus quatre font cinq, ce qui est pire que trois. Partir de C est encore pire : une taille de coupe de neuf.</a:t>
+              <a:t>Les trois méthodes trouvent une coupe de trois. Faites une pause et devinez : était-ce de la chance ?</a:t>
             </a:r>
           </a:p>
         </p:txBody>
@@ -733,7 +741,7 @@
           <a:lstStyle/>
           <a:p>
             <a:r>
-              <a:t>La solution est simple : ne jamais faire confiance à un seul départ. Construisez-en plusieurs : graines aléatoires, glouton, croissance depuis chaque nœud. Jetez toute partition qui enfreint la règle de taille. Gardez celle dont la coupe est la plus petite. Ici, le glouton et les cinq croissances donnent trois, cinq, cinq, neuf, trois, trois. Le meilleur est trois : A, B et C contre D et E.</a:t>
+              <a:t>Un seul mélange malchanceux peut rendre la coupe plus de cinq fois pire. Donc oui, c'était en partie de la chance. Avec la graine trois, B et D tombent d'un côté, et A, C et E de l'autre.</a:t>
             </a:r>
           </a:p>
         </p:txBody>
@@ -803,7 +811,7 @@
           <a:lstStyle/>
           <a:p>
             <a:r>
-              <a:t>Voici une étoile : A est au milieu, relié à toutes les autres cellules. A–B pèse neuf, et les quatre autres arêtes pèsent cinq. Avec six cellules, chaque côté doit en contenir exactement trois. Un ancien glouton sans limite de taille ajoutait toujours des cellules près de A. Il finissait avec cinq cellules contre une : coupe cinq, mais pas valide. Notre glouton arrête chaque côté à trois cellules, et obtient quinze. Aucune partition valide de cette étoile ne fait mieux.</a:t>
+              <a:t>Additionnons la coupe, arête par arête. A–B cinq, B–C quatre, C–D deux, et D–E cinq. Cela fait seize.</a:t>
             </a:r>
           </a:p>
         </p:txBody>
@@ -873,7 +881,7 @@
           <a:lstStyle/>
           <a:p>
             <a:r>
-              <a:t>Dans ce graphe, A–B et D–E pèsent de nouveau cinq toutes les deux. Le glouton doit en choisir une pour démarrer. La règle prend le plus petit nom, A–B, et cela donne une taille de coupe de neuf. Démarrer de D–E donne une taille de coupe de quatre. Une simple règle de départage a donc plus que doublé la coupe. La croissance depuis C trouve aussi quatre, une raison de plus d'essayer plusieurs départs.</a:t>
+              <a:t>Les deux arêtes lourdes sont coupées : c'est la pire partition valide qui existe. Sur seize graines, la coupe va de trois à seize. Seules trois de ces graines trouvent la meilleure coupe, trois.</a:t>
             </a:r>
           </a:p>
         </p:txBody>
@@ -943,7 +951,7 @@
           <a:lstStyle/>
           <a:p>
             <a:r>
-              <a:t>Voici deux triangles, reliés par un seul pont, C–D, de poids quatre. Chaque arête de triangle pèse trois. La coupe naturelle met un triangle de chaque côté, et ne coupe que le pont. Mais le glouton démarre de l'arête la plus lourde, et ici c'est le pont lui-même. C et D commencent donc du même côté, et la coupe finit à douze. La croissance depuis A garde son triangle ensemble et ne coupe que le pont : quatre.</a:t>
+              <a:t>La croissance n'a pas de hasard, mais elle a un choix : le nœud de départ. Partons de A au lieu de D.</a:t>
             </a:r>
           </a:p>
         </p:txBody>
@@ -1013,7 +1021,7 @@
           <a:lstStyle/>
           <a:p>
             <a:r>
-              <a:t>Dans le lab du navigateur, vous travaillez sur le même petit graphe. Vous pouvez déplacer des cellules d'un côté à l'autre, et voir la taille de coupe et l'équilibre changer. Vous pouvez aussi lancer l'aléatoire, le glouton et la croissance, et comparer leurs coupes. Les défis vérifient la partition que vous avez construite, pas le bouton sur lequel vous avez cliqué. Par exemple : trouvez le nœud de départ qui donne la plus petite coupe.</a:t>
+              <a:t>L'arête la plus lourde qui sort de A va vers B, avec un poids de cinq, donc B rejoint A. Avec deux cellules, le côté est plein, et il s'arrête.</a:t>
             </a:r>
           </a:p>
         </p:txBody>
@@ -1083,7 +1091,7 @@
           <a:lstStyle/>
           <a:p>
             <a:r>
-              <a:t>Si vous aimez programmer, écrivez les trois méthodes en Python. Le fichier d'exemples donne les règles exactes, y compris la façon de départager les égalités. D'abord, lancez le vérificateur pour afficher toutes les bonnes réponses. Ensuite écrivez vos propres fonctions, et lancez le vérificateur sur votre fichier. Il passe aussi le graphe à l'envers, donc une règle de départage manquante se voit comme un échec.</a:t>
+              <a:t>C, D et E forment l'autre côté, donc A–C et B–C sont coupées. Un plus quatre font cinq, ce qui est pire que trois. Partir de C est encore pire : une coupe de neuf.</a:t>
             </a:r>
           </a:p>
         </p:txBody>
@@ -1153,7 +1161,7 @@
           <a:lstStyle/>
           <a:p>
             <a:r>
-              <a:t>Attention à quatre erreurs courantes. Donner la taille de coupe sans l'équilibre. Laisser un côté dépasser sa limite, ce qui embellit la coupe. Se fier à une seule graine : ici, la coupe va de trois à seize. Et départager selon l'ordre de l'entrée : la réponse change avec le fichier.</a:t>
+              <a:t>La solution est simple : essayer plusieurs départs, garder le meilleur. Construisez quelques graines aléatoires, le glouton, et la croissance depuis chaque nœud. Jetez toute partition qui enfreint la règle de taille, puis gardez la plus petite coupe. Ici, le glouton et les cinq croissances donnent trois, cinq, cinq, neuf, trois et trois. Le meilleur est donc trois : A, B et C contre D et E. Faites une pause et devinez : une coupe plus petite peut-elle être le mauvais choix ?</a:t>
             </a:r>
           </a:p>
         </p:txBody>
@@ -1223,7 +1231,7 @@
           <a:lstStyle/>
           <a:p>
             <a:r>
-              <a:t>Des méthodes comme KL et FM ont besoin d'une première partition valide. L'aléatoire mélange et distribue : c'est rapide, mais cela dépend de la chance. Le glouton garde l'arête la plus lourde dedans, puis coupe le moins possible. La croissance s'étend depuis un nœud de départ, donc le nœud de départ compte. Les égalités et les limites de taille peuvent changer la réponse. Construisez plusieurs départs, gardez les valides, choisissez la plus petite coupe.</a:t>
+              <a:t>Trois pièges peuvent tromper une méthode qui a l'air raisonnable. Et oui, une coupe plus petite peut être le mauvais choix. Voici une étoile : A au milieu, relié à cinq autres cellules. Un ancien glouton sans limite de taille ajoutait toujours des cellules près de A. Il finissait avec cinq cellules contre une, et une coupe de cinq.</a:t>
             </a:r>
           </a:p>
         </p:txBody>
@@ -1293,7 +1301,7 @@
           <a:lstStyle/>
           <a:p>
             <a:r>
-              <a:t>Une puce est faite de petites briques appelées cellules, reliées par des fils. On dessine chaque cellule comme un point, appelé nœud. Un trait entre deux nœuds est une arête : les deux cellules sont reliées. Le nombre sur une arête est son poids : combien de fils relient la paire. Notre exemple a cinq cellules, de A à E. Les arêtes les plus lourdes, A–B et D–E, ont cinq fils chacune.</a:t>
+              <a:t>Une puce est faite de petites briques appelées cellules, reliées par des fils. Notre exemple a cinq cellules, nommées de A à E. Certaines paires partagent beaucoup de fils, d'autres un seul.</a:t>
             </a:r>
           </a:p>
         </p:txBody>
@@ -1363,7 +1371,567 @@
           <a:lstStyle/>
           <a:p>
             <a:r>
-              <a:t>C'est maintenant à vous. Choisissez un parcours : le lab dans le navigateur, le parcours Python, ou les deux. Cochez chaque case de la liste de contrôle au fur et à mesure. Puis faites le court quiz pour vérifier les idées principales. La suite, c'est Kernighan–Lin, qui part de votre partition et l'améliore.</a:t>
+              <a:t>Avec six cellules, il en faut trois par côté, donc cette partition n'est pas valide. Notre glouton arrête chaque côté à trois cellules, et obtient quinze. Aucune partition valide de cette étoile ne fait mieux.</a:t>
+            </a:r>
+          </a:p>
+        </p:txBody>
+      </p:sp>
+      <p:sp>
+        <p:nvSpPr>
+          <p:cNvPr id="4" name="Slide Number Placeholder 3"/>
+          <p:cNvSpPr>
+            <a:spLocks noGrp="1"/>
+          </p:cNvSpPr>
+          <p:nvPr>
+            <p:ph type="sldNum" idx="5" sz="quarter"/>
+          </p:nvPr>
+        </p:nvSpPr>
+        <p:spPr/>
+      </p:sp>
+    </p:spTree>
+  </p:cSld>
+  <p:clrMapOvr>
+    <a:masterClrMapping/>
+  </p:clrMapOvr>
+</p:notes>
+</file>
+
+<file path=ppt/notesSlides/notesSlide21.xml><?xml version="1.0" encoding="utf-8"?>
+<p:notes xmlns:a="http://schemas.openxmlformats.org/drawingml/2006/main" xmlns:p="http://schemas.openxmlformats.org/presentationml/2006/main" xmlns:r="http://schemas.openxmlformats.org/officeDocument/2006/relationships">
+  <p:cSld>
+    <p:spTree>
+      <p:nvGrpSpPr>
+        <p:cNvPr id="1" name=""/>
+        <p:cNvGrpSpPr/>
+        <p:nvPr/>
+      </p:nvGrpSpPr>
+      <p:grpSpPr>
+        <a:xfrm>
+          <a:off x="0" y="0"/>
+          <a:ext cx="0" cy="0"/>
+          <a:chOff x="0" y="0"/>
+          <a:chExt cx="0" cy="0"/>
+        </a:xfrm>
+      </p:grpSpPr>
+      <p:sp>
+        <p:nvSpPr>
+          <p:cNvPr id="2" name="Slide Image Placeholder 1"/>
+          <p:cNvSpPr>
+            <a:spLocks noGrp="1"/>
+          </p:cNvSpPr>
+          <p:nvPr>
+            <p:ph type="sldImg" idx="2"/>
+          </p:nvPr>
+        </p:nvSpPr>
+        <p:spPr/>
+      </p:sp>
+      <p:sp>
+        <p:nvSpPr>
+          <p:cNvPr id="3" name="Notes Placeholder 2"/>
+          <p:cNvSpPr>
+            <a:spLocks noGrp="1"/>
+          </p:cNvSpPr>
+          <p:nvPr>
+            <p:ph type="body" idx="3" sz="quarter"/>
+          </p:nvPr>
+        </p:nvSpPr>
+        <p:spPr/>
+        <p:txBody>
+          <a:bodyPr/>
+          <a:lstStyle/>
+          <a:p>
+            <a:r>
+              <a:t>Dans ce graphe, A–B et D–E pèsent cinq toutes les deux. Le glouton doit en choisir une pour démarrer. La règle prend le plus petit nom, A–B, et cela donne une coupe de neuf.</a:t>
+            </a:r>
+          </a:p>
+        </p:txBody>
+      </p:sp>
+      <p:sp>
+        <p:nvSpPr>
+          <p:cNvPr id="4" name="Slide Number Placeholder 3"/>
+          <p:cNvSpPr>
+            <a:spLocks noGrp="1"/>
+          </p:cNvSpPr>
+          <p:nvPr>
+            <p:ph type="sldNum" idx="5" sz="quarter"/>
+          </p:nvPr>
+        </p:nvSpPr>
+        <p:spPr/>
+      </p:sp>
+    </p:spTree>
+  </p:cSld>
+  <p:clrMapOvr>
+    <a:masterClrMapping/>
+  </p:clrMapOvr>
+</p:notes>
+</file>
+
+<file path=ppt/notesSlides/notesSlide22.xml><?xml version="1.0" encoding="utf-8"?>
+<p:notes xmlns:a="http://schemas.openxmlformats.org/drawingml/2006/main" xmlns:p="http://schemas.openxmlformats.org/presentationml/2006/main" xmlns:r="http://schemas.openxmlformats.org/officeDocument/2006/relationships">
+  <p:cSld>
+    <p:spTree>
+      <p:nvGrpSpPr>
+        <p:cNvPr id="1" name=""/>
+        <p:cNvGrpSpPr/>
+        <p:nvPr/>
+      </p:nvGrpSpPr>
+      <p:grpSpPr>
+        <a:xfrm>
+          <a:off x="0" y="0"/>
+          <a:ext cx="0" cy="0"/>
+          <a:chOff x="0" y="0"/>
+          <a:chExt cx="0" cy="0"/>
+        </a:xfrm>
+      </p:grpSpPr>
+      <p:sp>
+        <p:nvSpPr>
+          <p:cNvPr id="2" name="Slide Image Placeholder 1"/>
+          <p:cNvSpPr>
+            <a:spLocks noGrp="1"/>
+          </p:cNvSpPr>
+          <p:nvPr>
+            <p:ph type="sldImg" idx="2"/>
+          </p:nvPr>
+        </p:nvSpPr>
+        <p:spPr/>
+      </p:sp>
+      <p:sp>
+        <p:nvSpPr>
+          <p:cNvPr id="3" name="Notes Placeholder 2"/>
+          <p:cNvSpPr>
+            <a:spLocks noGrp="1"/>
+          </p:cNvSpPr>
+          <p:nvPr>
+            <p:ph type="body" idx="3" sz="quarter"/>
+          </p:nvPr>
+        </p:nvSpPr>
+        <p:spPr/>
+        <p:txBody>
+          <a:bodyPr/>
+          <a:lstStyle/>
+          <a:p>
+            <a:r>
+              <a:t>Démarrer de D–E donne une coupe de quatre. Une simple règle de départage a donc plus que doublé la coupe. La croissance depuis C trouve aussi quatre.</a:t>
+            </a:r>
+          </a:p>
+        </p:txBody>
+      </p:sp>
+      <p:sp>
+        <p:nvSpPr>
+          <p:cNvPr id="4" name="Slide Number Placeholder 3"/>
+          <p:cNvSpPr>
+            <a:spLocks noGrp="1"/>
+          </p:cNvSpPr>
+          <p:nvPr>
+            <p:ph type="sldNum" idx="5" sz="quarter"/>
+          </p:nvPr>
+        </p:nvSpPr>
+        <p:spPr/>
+      </p:sp>
+    </p:spTree>
+  </p:cSld>
+  <p:clrMapOvr>
+    <a:masterClrMapping/>
+  </p:clrMapOvr>
+</p:notes>
+</file>
+
+<file path=ppt/notesSlides/notesSlide23.xml><?xml version="1.0" encoding="utf-8"?>
+<p:notes xmlns:a="http://schemas.openxmlformats.org/drawingml/2006/main" xmlns:p="http://schemas.openxmlformats.org/presentationml/2006/main" xmlns:r="http://schemas.openxmlformats.org/officeDocument/2006/relationships">
+  <p:cSld>
+    <p:spTree>
+      <p:nvGrpSpPr>
+        <p:cNvPr id="1" name=""/>
+        <p:cNvGrpSpPr/>
+        <p:nvPr/>
+      </p:nvGrpSpPr>
+      <p:grpSpPr>
+        <a:xfrm>
+          <a:off x="0" y="0"/>
+          <a:ext cx="0" cy="0"/>
+          <a:chOff x="0" y="0"/>
+          <a:chExt cx="0" cy="0"/>
+        </a:xfrm>
+      </p:grpSpPr>
+      <p:sp>
+        <p:nvSpPr>
+          <p:cNvPr id="2" name="Slide Image Placeholder 1"/>
+          <p:cNvSpPr>
+            <a:spLocks noGrp="1"/>
+          </p:cNvSpPr>
+          <p:nvPr>
+            <p:ph type="sldImg" idx="2"/>
+          </p:nvPr>
+        </p:nvSpPr>
+        <p:spPr/>
+      </p:sp>
+      <p:sp>
+        <p:nvSpPr>
+          <p:cNvPr id="3" name="Notes Placeholder 2"/>
+          <p:cNvSpPr>
+            <a:spLocks noGrp="1"/>
+          </p:cNvSpPr>
+          <p:nvPr>
+            <p:ph type="body" idx="3" sz="quarter"/>
+          </p:nvPr>
+        </p:nvSpPr>
+        <p:spPr/>
+        <p:txBody>
+          <a:bodyPr/>
+          <a:lstStyle/>
+          <a:p>
+            <a:r>
+              <a:t>Voici deux triangles, reliés par un seul pont, C–D, de poids quatre. Chaque arête de triangle pèse trois. Le glouton démarre de l'arête la plus lourde, qui est ici le pont lui-même. C et D commencent donc du même côté, et la coupe finit à douze.</a:t>
+            </a:r>
+          </a:p>
+        </p:txBody>
+      </p:sp>
+      <p:sp>
+        <p:nvSpPr>
+          <p:cNvPr id="4" name="Slide Number Placeholder 3"/>
+          <p:cNvSpPr>
+            <a:spLocks noGrp="1"/>
+          </p:cNvSpPr>
+          <p:nvPr>
+            <p:ph type="sldNum" idx="5" sz="quarter"/>
+          </p:nvPr>
+        </p:nvSpPr>
+        <p:spPr/>
+      </p:sp>
+    </p:spTree>
+  </p:cSld>
+  <p:clrMapOvr>
+    <a:masterClrMapping/>
+  </p:clrMapOvr>
+</p:notes>
+</file>
+
+<file path=ppt/notesSlides/notesSlide24.xml><?xml version="1.0" encoding="utf-8"?>
+<p:notes xmlns:a="http://schemas.openxmlformats.org/drawingml/2006/main" xmlns:p="http://schemas.openxmlformats.org/presentationml/2006/main" xmlns:r="http://schemas.openxmlformats.org/officeDocument/2006/relationships">
+  <p:cSld>
+    <p:spTree>
+      <p:nvGrpSpPr>
+        <p:cNvPr id="1" name=""/>
+        <p:cNvGrpSpPr/>
+        <p:nvPr/>
+      </p:nvGrpSpPr>
+      <p:grpSpPr>
+        <a:xfrm>
+          <a:off x="0" y="0"/>
+          <a:ext cx="0" cy="0"/>
+          <a:chOff x="0" y="0"/>
+          <a:chExt cx="0" cy="0"/>
+        </a:xfrm>
+      </p:grpSpPr>
+      <p:sp>
+        <p:nvSpPr>
+          <p:cNvPr id="2" name="Slide Image Placeholder 1"/>
+          <p:cNvSpPr>
+            <a:spLocks noGrp="1"/>
+          </p:cNvSpPr>
+          <p:nvPr>
+            <p:ph type="sldImg" idx="2"/>
+          </p:nvPr>
+        </p:nvSpPr>
+        <p:spPr/>
+      </p:sp>
+      <p:sp>
+        <p:nvSpPr>
+          <p:cNvPr id="3" name="Notes Placeholder 2"/>
+          <p:cNvSpPr>
+            <a:spLocks noGrp="1"/>
+          </p:cNvSpPr>
+          <p:nvPr>
+            <p:ph type="body" idx="3" sz="quarter"/>
+          </p:nvPr>
+        </p:nvSpPr>
+        <p:spPr/>
+        <p:txBody>
+          <a:bodyPr/>
+          <a:lstStyle/>
+          <a:p>
+            <a:r>
+              <a:t>La croissance depuis A garde son triangle ensemble, et ne coupe que le pont : quatre. Faites une pause et devinez : la croissance est-elle toujours meilleure que le glouton ?</a:t>
+            </a:r>
+          </a:p>
+        </p:txBody>
+      </p:sp>
+      <p:sp>
+        <p:nvSpPr>
+          <p:cNvPr id="4" name="Slide Number Placeholder 3"/>
+          <p:cNvSpPr>
+            <a:spLocks noGrp="1"/>
+          </p:cNvSpPr>
+          <p:nvPr>
+            <p:ph type="sldNum" idx="5" sz="quarter"/>
+          </p:nvPr>
+        </p:nvSpPr>
+        <p:spPr/>
+      </p:sp>
+    </p:spTree>
+  </p:cSld>
+  <p:clrMapOvr>
+    <a:masterClrMapping/>
+  </p:clrMapOvr>
+</p:notes>
+</file>
+
+<file path=ppt/notesSlides/notesSlide25.xml><?xml version="1.0" encoding="utf-8"?>
+<p:notes xmlns:a="http://schemas.openxmlformats.org/drawingml/2006/main" xmlns:p="http://schemas.openxmlformats.org/presentationml/2006/main" xmlns:r="http://schemas.openxmlformats.org/officeDocument/2006/relationships">
+  <p:cSld>
+    <p:spTree>
+      <p:nvGrpSpPr>
+        <p:cNvPr id="1" name=""/>
+        <p:cNvGrpSpPr/>
+        <p:nvPr/>
+      </p:nvGrpSpPr>
+      <p:grpSpPr>
+        <a:xfrm>
+          <a:off x="0" y="0"/>
+          <a:ext cx="0" cy="0"/>
+          <a:chOff x="0" y="0"/>
+          <a:chExt cx="0" cy="0"/>
+        </a:xfrm>
+      </p:grpSpPr>
+      <p:sp>
+        <p:nvSpPr>
+          <p:cNvPr id="2" name="Slide Image Placeholder 1"/>
+          <p:cNvSpPr>
+            <a:spLocks noGrp="1"/>
+          </p:cNvSpPr>
+          <p:nvPr>
+            <p:ph type="sldImg" idx="2"/>
+          </p:nvPr>
+        </p:nvSpPr>
+        <p:spPr/>
+      </p:sp>
+      <p:sp>
+        <p:nvSpPr>
+          <p:cNvPr id="3" name="Notes Placeholder 2"/>
+          <p:cNvSpPr>
+            <a:spLocks noGrp="1"/>
+          </p:cNvSpPr>
+          <p:nvPr>
+            <p:ph type="body" idx="3" sz="quarter"/>
+          </p:nvPr>
+        </p:nvSpPr>
+        <p:spPr/>
+        <p:txBody>
+          <a:bodyPr/>
+          <a:lstStyle/>
+          <a:p>
+            <a:r>
+              <a:t>À vous maintenant de construire les partitions. Et non, la croissance n'est pas toujours meilleure : sur notre premier graphe, le glouton trouvait trois, et la croissance depuis A seulement cinq. Dans le lab du navigateur, vous cliquez sur les cellules pour les changer de côté, et vous voyez les deux nombres changer. Vous pouvez aussi lancer l'aléatoire, le glouton et la croissance. Les défis vérifient la partition que vous avez construite, pas le bouton sur lequel vous avez cliqué.</a:t>
+            </a:r>
+          </a:p>
+        </p:txBody>
+      </p:sp>
+      <p:sp>
+        <p:nvSpPr>
+          <p:cNvPr id="4" name="Slide Number Placeholder 3"/>
+          <p:cNvSpPr>
+            <a:spLocks noGrp="1"/>
+          </p:cNvSpPr>
+          <p:nvPr>
+            <p:ph type="sldNum" idx="5" sz="quarter"/>
+          </p:nvPr>
+        </p:nvSpPr>
+        <p:spPr/>
+      </p:sp>
+    </p:spTree>
+  </p:cSld>
+  <p:clrMapOvr>
+    <a:masterClrMapping/>
+  </p:clrMapOvr>
+</p:notes>
+</file>
+
+<file path=ppt/notesSlides/notesSlide26.xml><?xml version="1.0" encoding="utf-8"?>
+<p:notes xmlns:a="http://schemas.openxmlformats.org/drawingml/2006/main" xmlns:p="http://schemas.openxmlformats.org/presentationml/2006/main" xmlns:r="http://schemas.openxmlformats.org/officeDocument/2006/relationships">
+  <p:cSld>
+    <p:spTree>
+      <p:nvGrpSpPr>
+        <p:cNvPr id="1" name=""/>
+        <p:cNvGrpSpPr/>
+        <p:nvPr/>
+      </p:nvGrpSpPr>
+      <p:grpSpPr>
+        <a:xfrm>
+          <a:off x="0" y="0"/>
+          <a:ext cx="0" cy="0"/>
+          <a:chOff x="0" y="0"/>
+          <a:chExt cx="0" cy="0"/>
+        </a:xfrm>
+      </p:grpSpPr>
+      <p:sp>
+        <p:nvSpPr>
+          <p:cNvPr id="2" name="Slide Image Placeholder 1"/>
+          <p:cNvSpPr>
+            <a:spLocks noGrp="1"/>
+          </p:cNvSpPr>
+          <p:nvPr>
+            <p:ph type="sldImg" idx="2"/>
+          </p:nvPr>
+        </p:nvSpPr>
+        <p:spPr/>
+      </p:sp>
+      <p:sp>
+        <p:nvSpPr>
+          <p:cNvPr id="3" name="Notes Placeholder 2"/>
+          <p:cNvSpPr>
+            <a:spLocks noGrp="1"/>
+          </p:cNvSpPr>
+          <p:nvPr>
+            <p:ph type="body" idx="3" sz="quarter"/>
+          </p:nvPr>
+        </p:nvSpPr>
+        <p:spPr/>
+        <p:txBody>
+          <a:bodyPr/>
+          <a:lstStyle/>
+          <a:p>
+            <a:r>
+              <a:t>Si vous aimez programmer, écrivez les trois recettes en Python. Le fichier d'exemples donne les règles exactes, égalités comprises. Lancez d'abord le vérificateur pour afficher toutes les bonnes réponses. Puis lancez-le sur votre propre fichier. Il passe aussi le graphe à l'envers, donc une règle de départage manquante se voit comme un échec.</a:t>
+            </a:r>
+          </a:p>
+        </p:txBody>
+      </p:sp>
+      <p:sp>
+        <p:nvSpPr>
+          <p:cNvPr id="4" name="Slide Number Placeholder 3"/>
+          <p:cNvSpPr>
+            <a:spLocks noGrp="1"/>
+          </p:cNvSpPr>
+          <p:nvPr>
+            <p:ph type="sldNum" idx="5" sz="quarter"/>
+          </p:nvPr>
+        </p:nvSpPr>
+        <p:spPr/>
+      </p:sp>
+    </p:spTree>
+  </p:cSld>
+  <p:clrMapOvr>
+    <a:masterClrMapping/>
+  </p:clrMapOvr>
+</p:notes>
+</file>
+
+<file path=ppt/notesSlides/notesSlide27.xml><?xml version="1.0" encoding="utf-8"?>
+<p:notes xmlns:a="http://schemas.openxmlformats.org/drawingml/2006/main" xmlns:p="http://schemas.openxmlformats.org/presentationml/2006/main" xmlns:r="http://schemas.openxmlformats.org/officeDocument/2006/relationships">
+  <p:cSld>
+    <p:spTree>
+      <p:nvGrpSpPr>
+        <p:cNvPr id="1" name=""/>
+        <p:cNvGrpSpPr/>
+        <p:nvPr/>
+      </p:nvGrpSpPr>
+      <p:grpSpPr>
+        <a:xfrm>
+          <a:off x="0" y="0"/>
+          <a:ext cx="0" cy="0"/>
+          <a:chOff x="0" y="0"/>
+          <a:chExt cx="0" cy="0"/>
+        </a:xfrm>
+      </p:grpSpPr>
+      <p:sp>
+        <p:nvSpPr>
+          <p:cNvPr id="2" name="Slide Image Placeholder 1"/>
+          <p:cNvSpPr>
+            <a:spLocks noGrp="1"/>
+          </p:cNvSpPr>
+          <p:nvPr>
+            <p:ph type="sldImg" idx="2"/>
+          </p:nvPr>
+        </p:nvSpPr>
+        <p:spPr/>
+      </p:sp>
+      <p:sp>
+        <p:nvSpPr>
+          <p:cNvPr id="3" name="Notes Placeholder 2"/>
+          <p:cNvSpPr>
+            <a:spLocks noGrp="1"/>
+          </p:cNvSpPr>
+          <p:nvPr>
+            <p:ph type="body" idx="3" sz="quarter"/>
+          </p:nvPr>
+        </p:nvSpPr>
+        <p:spPr/>
+        <p:txBody>
+          <a:bodyPr/>
+          <a:lstStyle/>
+          <a:p>
+            <a:r>
+              <a:t>L'aléatoire est rapide, mais il dépend de la chance. Le glouton garde les arêtes lourdes dedans, mais égalités et ponts le trompent. La croissance dépend de son nœud de départ. Donnez l'équilibre avec chaque coupe, et ne laissez aucun côté dépasser sa limite. Départagez par le nom, pas par l'ordre du fichier d'entrée. Donc : essayer plusieurs départs, garder le meilleur départ valide.</a:t>
+            </a:r>
+          </a:p>
+        </p:txBody>
+      </p:sp>
+      <p:sp>
+        <p:nvSpPr>
+          <p:cNvPr id="4" name="Slide Number Placeholder 3"/>
+          <p:cNvSpPr>
+            <a:spLocks noGrp="1"/>
+          </p:cNvSpPr>
+          <p:nvPr>
+            <p:ph type="sldNum" idx="5" sz="quarter"/>
+          </p:nvPr>
+        </p:nvSpPr>
+        <p:spPr/>
+      </p:sp>
+    </p:spTree>
+  </p:cSld>
+  <p:clrMapOvr>
+    <a:masterClrMapping/>
+  </p:clrMapOvr>
+</p:notes>
+</file>
+
+<file path=ppt/notesSlides/notesSlide28.xml><?xml version="1.0" encoding="utf-8"?>
+<p:notes xmlns:a="http://schemas.openxmlformats.org/drawingml/2006/main" xmlns:p="http://schemas.openxmlformats.org/presentationml/2006/main" xmlns:r="http://schemas.openxmlformats.org/officeDocument/2006/relationships">
+  <p:cSld>
+    <p:spTree>
+      <p:nvGrpSpPr>
+        <p:cNvPr id="1" name=""/>
+        <p:cNvGrpSpPr/>
+        <p:nvPr/>
+      </p:nvGrpSpPr>
+      <p:grpSpPr>
+        <a:xfrm>
+          <a:off x="0" y="0"/>
+          <a:ext cx="0" cy="0"/>
+          <a:chOff x="0" y="0"/>
+          <a:chExt cx="0" cy="0"/>
+        </a:xfrm>
+      </p:grpSpPr>
+      <p:sp>
+        <p:nvSpPr>
+          <p:cNvPr id="2" name="Slide Image Placeholder 1"/>
+          <p:cNvSpPr>
+            <a:spLocks noGrp="1"/>
+          </p:cNvSpPr>
+          <p:nvPr>
+            <p:ph type="sldImg" idx="2"/>
+          </p:nvPr>
+        </p:nvSpPr>
+        <p:spPr/>
+      </p:sp>
+      <p:sp>
+        <p:nvSpPr>
+          <p:cNvPr id="3" name="Notes Placeholder 2"/>
+          <p:cNvSpPr>
+            <a:spLocks noGrp="1"/>
+          </p:cNvSpPr>
+          <p:nvPr>
+            <p:ph type="body" idx="3" sz="quarter"/>
+          </p:nvPr>
+        </p:nvSpPr>
+        <p:spPr/>
+        <p:txBody>
+          <a:bodyPr/>
+          <a:lstStyle/>
+          <a:p>
+            <a:r>
+              <a:t>Choisissez un parcours : le lab dans le navigateur, Python, ou les deux. Cochez chaque case de la liste de contrôle, puis faites le court quiz. La suite, c'est Kernighan–Lin, qui part de votre partition et l'améliore. Faites une pause et devinez : de combien peut-il réduire la coupe malchanceuse de seize ? Le lab quatre vous le montrera.</a:t>
             </a:r>
           </a:p>
         </p:txBody>
@@ -1433,7 +2001,7 @@
           <a:lstStyle/>
           <a:p>
             <a:r>
-              <a:t>Couper une puce en deux côtés s'appelle une bipartition. Les arêtes qui passent d'un côté à l'autre sont coupées, et on les dessine en rouge. La taille de coupe additionne leurs poids : ici, deux plus un font trois. Tout mettre du même côté donne une coupe de zéro, mais cela ne sert à rien. On vérifie donc aussi l'équilibre : combien de cellules chaque côté contient. Une partition est valide quand aucun côté ne dépasse trois cellules sur cinq.</a:t>
+              <a:t>On dessine chaque cellule comme un point, appelé nœud. Un trait entre deux nœuds est une arête. Son nombre, le poids, compte les fils entre les deux cellules. A–B et D–E sont les plus lourdes, avec cinq fils chacune.</a:t>
             </a:r>
           </a:p>
         </p:txBody>
@@ -1503,7 +2071,7 @@
           <a:lstStyle/>
           <a:p>
             <a:r>
-              <a:t>Les labs quatre et cinq enseignent deux méthodes célèbres, appelées KL et FM. Elles améliorent une partition en déplaçant des cellules d'un côté à l'autre. Mais elles ne peuvent qu'améliorer : il leur faut une partition valide pour démarrer. Pensez à former deux équipes pour un jeu. D'abord deux équipes au hasard, puis on échange des joueurs pour équilibrer. Un bon premier découpage laisse moins d'échanges à faire.</a:t>
+              <a:t>Couper les cellules en deux côtés s'appelle une bipartition. Les arêtes qui passent d'un côté à l'autre sont coupées, et dessinées en rouge. La taille de coupe additionne leurs poids : ici, deux plus un font trois.</a:t>
             </a:r>
           </a:p>
         </p:txBody>
@@ -1573,7 +2141,7 @@
           <a:lstStyle/>
           <a:p>
             <a:r>
-              <a:t>Voici notre graphe, avant toute coupe. Il a cinq cellules, donc les côtés auront deux cellules et trois cellules. Chaque méthode donne deux nombres : la taille de coupe et l'équilibre. Construisons une première partition de trois façons différentes.</a:t>
+              <a:t>Tout mettre du même côté donne une coupe de zéro, mais cela ne sert à rien. On vérifie donc aussi l'équilibre : combien de cellules chaque côté contient. Une partition est valide quand aucun côté ne dépasse trois cellules sur cinq.</a:t>
             </a:r>
           </a:p>
         </p:txBody>
@@ -1643,7 +2211,7 @@
           <a:lstStyle/>
           <a:p>
             <a:r>
-              <a:t>La méthode un est l'aléatoire. Écrivez les cinq noms sur des cartes, mélangez-les, et donnez deux cartes à un côté. Les trois autres cartes vont de l'autre côté. Un ordinateur mélange à l'aide d'un nombre appelé la graine. La même graine donne toujours le même mélange. Avec la graine cinq, D et E tombent ensemble. Seules C–D et C–E sont coupées, donc la taille de coupe est trois. C'est la meilleure partition de ce graphe, trouvée par pure chance.</a:t>
+              <a:t>Les labs quatre et cinq enseignent deux méthodes célèbres, appelées KL et FM. Elles améliorent une partition en déplaçant des cellules d'un côté à l'autre. Mais KL et FM ont besoin d'une partition valide pour démarrer. Pensez à former deux équipes : d'abord deux équipes au hasard, puis des échanges. Un bon premier découpage laisse moins d'échanges à faire. Faites une pause et devinez : le hasard peut-il aussi trouver une coupe de trois ?</a:t>
             </a:r>
           </a:p>
         </p:txBody>
@@ -1713,7 +2281,7 @@
           <a:lstStyle/>
           <a:p>
             <a:r>
-              <a:t>La méthode deux est la méthode gloutonne : à chaque étape, elle prend ce qui paraît le meilleur sur le moment. Elle commence par mettre les deux bouts de l'arête la plus lourde du même côté. A–B et D–E pèsent cinq toutes les deux, donc une règle fixe choisit le plus petit nom : A–B. D démarre l'autre côté : il n'a aucun fil vers A ou B, et il vient avant E. C rejoint A et B, avec cinq fils de ce côté contre deux vers D. Enfin E rejoint D, ce qui ne coupe que l'arête de poids un vers C. La taille de coupe est trois.</a:t>
+              <a:t>Trois recettes courtes peuvent construire une première partition : aléatoire, gloutonne et par croissance. Et oui, une partition au hasard peut atteindre une coupe de trois, avec de la chance. Chaque recette met deux cellules d'un côté, et trois de l'autre.</a:t>
             </a:r>
           </a:p>
         </p:txBody>
@@ -1783,7 +2351,7 @@
           <a:lstStyle/>
           <a:p>
             <a:r>
-              <a:t>La méthode trois est la croissance. Choisissez un nœud de départ, et faites grandir un côté autour de lui, comme une goutte d'encre qui s'étale sur le papier. À chaque étape, ajoutez le nœud au bout de l'arête la plus lourde qui sort du côté. Partons de D. L'arête la plus lourde qui sort de D va vers E, avec un poids de cinq. Le côté contient alors deux cellules sur cinq, ce qui suffit, donc il s'arrête. A, B et C forment l'autre côté, et la taille de coupe vaut encore trois.</a:t>
+              <a:t>La recette un est l'aléatoire. Mélangez les cinq noms comme des cartes, et donnez-en deux à un côté. Un nombre appelé la graine fixe le mélange : la même graine donne toujours la même partition. La graine cinq met D et E ensemble. Seules C–D et C–E sont coupées : trois.</a:t>
             </a:r>
           </a:p>
         </p:txBody>
@@ -1853,7 +2421,7 @@
           <a:lstStyle/>
           <a:p>
             <a:r>
-              <a:t>Jusqu'ici, les trois méthodes ont trouvé la même partition. Mais c'était en partie de la chance. D'autres graines et d'autres nœuds de départ donnent des coupes de trois jusqu'à seize. Chacune de ces partitions est valide, donc aucune n'est fausse. C'est pourquoi on construit plusieurs départs, et on garde celui qui a la plus petite coupe.</a:t>
+              <a:t>La recette deux est gloutonne : à chaque étape, elle prend ce qui paraît le meilleur sur le moment. Elle garde l'arête la plus lourde, A–B, d'un seul côté. D, qui n'a aucun fil vers A ou B, démarre l'autre côté. Chaque autre cellule rejoint le côté où elle coupe le moins. La coupe vaut encore trois.</a:t>
             </a:r>
           </a:p>
         </p:txBody>
@@ -4915,7 +5483,7 @@
                 </a:solidFill>
                 <a:latin typeface="Calibri"/>
               </a:rPr>
-              <a:t>Avant d'améliorer une coupe, il faut une première coupe</a:t>
+              <a:t>Avant d'améliorer une coupe, il faut une première coupe, appelée la bipartition initiale</a:t>
             </a:r>
           </a:p>
         </p:txBody>
@@ -5011,169 +5579,14 @@
                 </a:solidFill>
                 <a:latin typeface="Calibri"/>
               </a:rPr>
-              <a:t>Exemple détaillé : une graine malchanceuse</a:t>
-            </a:r>
-          </a:p>
-        </p:txBody>
-      </p:sp>
-      <p:sp>
-        <p:nvSpPr>
-          <p:cNvPr id="3" name="TextBox 2"/>
-          <p:cNvSpPr txBox="1"/>
-          <p:nvPr/>
-        </p:nvSpPr>
-        <p:spPr>
-          <a:xfrm>
-            <a:off x="548640" y="1234440"/>
-            <a:ext cx="5303520" cy="4754880"/>
-          </a:xfrm>
-          <a:prstGeom prst="rect">
-            <a:avLst/>
-          </a:prstGeom>
-          <a:noFill/>
-        </p:spPr>
-        <p:txBody>
-          <a:bodyPr wrap="square">
-            <a:noAutofit/>
-          </a:bodyPr>
-          <a:lstStyle/>
-          <a:p>
-            <a:pPr lvl="0" marL="457200" indent="-228600">
-              <a:buFont typeface="Calibri"/>
-              <a:spcAft>
-                <a:spcPts val="1000"/>
-              </a:spcAft>
-              <a:buSzPct val="100000"/>
-              <a:buChar char="•"/>
-              <a:lnSpc>
-                <a:spcPts val="2200"/>
-              </a:lnSpc>
-            </a:pPr>
-            <a:r>
-              <a:rPr sz="2000" b="0">
-                <a:solidFill>
-                  <a:srgbClr val="333333"/>
-                </a:solidFill>
-                <a:latin typeface="Calibri"/>
-              </a:rPr>
-              <a:t>Voyons maintenant jusqu'où peut aller la malchance</a:t>
-            </a:r>
-          </a:p>
-          <a:p>
-            <a:pPr lvl="0" marL="457200" indent="-228600">
-              <a:buFont typeface="Calibri"/>
-              <a:spcAft>
-                <a:spcPts val="1000"/>
-              </a:spcAft>
-              <a:buSzPct val="100000"/>
-              <a:buChar char="•"/>
-              <a:lnSpc>
-                <a:spcPts val="2200"/>
-              </a:lnSpc>
-            </a:pPr>
-            <a:r>
-              <a:rPr sz="2000" b="0">
-                <a:solidFill>
-                  <a:srgbClr val="333333"/>
-                </a:solidFill>
-                <a:latin typeface="Calibri"/>
-              </a:rPr>
-              <a:t>Avec la graine trois, le mélange donne B et D à un côté</a:t>
-            </a:r>
-          </a:p>
-          <a:p>
-            <a:pPr lvl="0" marL="457200" indent="-228600">
-              <a:buFont typeface="Calibri"/>
-              <a:spcAft>
-                <a:spcPts val="1000"/>
-              </a:spcAft>
-              <a:buSzPct val="100000"/>
-              <a:buChar char="•"/>
-              <a:lnSpc>
-                <a:spcPts val="2200"/>
-              </a:lnSpc>
-            </a:pPr>
-            <a:r>
-              <a:rPr sz="2000" b="0">
-                <a:solidFill>
-                  <a:srgbClr val="333333"/>
-                </a:solidFill>
-                <a:latin typeface="Calibri"/>
-              </a:rPr>
-              <a:t>A, C et E se retrouvent de l'autre</a:t>
-            </a:r>
-          </a:p>
-          <a:p>
-            <a:pPr lvl="0" marL="457200" indent="-228600">
-              <a:buFont typeface="Calibri"/>
-              <a:spcAft>
-                <a:spcPts val="1000"/>
-              </a:spcAft>
-              <a:buSzPct val="100000"/>
-              <a:buChar char="•"/>
-              <a:lnSpc>
-                <a:spcPts val="2200"/>
-              </a:lnSpc>
-            </a:pPr>
-            <a:r>
-              <a:rPr sz="2000" b="0">
-                <a:solidFill>
-                  <a:srgbClr val="333333"/>
-                </a:solidFill>
-                <a:latin typeface="Calibri"/>
-              </a:rPr>
-              <a:t>Additionnons la coupe, arête par arête</a:t>
-            </a:r>
-          </a:p>
-          <a:p>
-            <a:pPr lvl="0" marL="457200" indent="-228600">
-              <a:buFont typeface="Calibri"/>
-              <a:spcAft>
-                <a:spcPts val="1000"/>
-              </a:spcAft>
-              <a:buSzPct val="100000"/>
-              <a:buChar char="•"/>
-              <a:lnSpc>
-                <a:spcPts val="2200"/>
-              </a:lnSpc>
-            </a:pPr>
-            <a:r>
-              <a:rPr sz="2000" b="0">
-                <a:solidFill>
-                  <a:srgbClr val="333333"/>
-                </a:solidFill>
-                <a:latin typeface="Calibri"/>
-              </a:rPr>
-              <a:t>A–B cinq, B–C quatre, C–D deux et D–E cinq : seize au total</a:t>
-            </a:r>
-          </a:p>
-          <a:p>
-            <a:pPr lvl="0" marL="457200" indent="-228600">
-              <a:buFont typeface="Calibri"/>
-              <a:spcAft>
-                <a:spcPts val="1000"/>
-              </a:spcAft>
-              <a:buSzPct val="100000"/>
-              <a:buChar char="•"/>
-              <a:lnSpc>
-                <a:spcPts val="2200"/>
-              </a:lnSpc>
-            </a:pPr>
-            <a:r>
-              <a:rPr sz="2000" b="0">
-                <a:solidFill>
-                  <a:srgbClr val="333333"/>
-                </a:solidFill>
-                <a:latin typeface="Calibri"/>
-              </a:rPr>
-              <a:t>Les deux arêtes lourdes sont coupées, donc c'est la pire partition valide qui existe</a:t>
+              <a:t>Croissance depuis D : ABC|DE, coupe 3</a:t>
             </a:r>
           </a:p>
         </p:txBody>
       </p:sp>
       <p:pic>
         <p:nvPicPr>
-          <p:cNvPr id="4" name="Picture 3" descr="worked-unlucky.png"/>
+          <p:cNvPr id="3" name="Picture 2" descr="04-grow-d.png"/>
           <p:cNvPicPr>
             <a:picLocks noChangeAspect="1"/>
           </p:cNvPicPr>
@@ -5187,14 +5600,53 @@
         </p:blipFill>
         <p:spPr>
           <a:xfrm>
-            <a:off x="6172200" y="1234440"/>
-            <a:ext cx="4991147" cy="4754880"/>
+            <a:off x="548640" y="1143000"/>
+            <a:ext cx="9183076" cy="4572000"/>
           </a:xfrm>
           <a:prstGeom prst="rect">
             <a:avLst/>
           </a:prstGeom>
         </p:spPr>
       </p:pic>
+      <p:sp>
+        <p:nvSpPr>
+          <p:cNvPr id="4" name="TextBox 3"/>
+          <p:cNvSpPr txBox="1"/>
+          <p:nvPr/>
+        </p:nvSpPr>
+        <p:spPr>
+          <a:xfrm>
+            <a:off x="548640" y="5897880"/>
+            <a:ext cx="11064240" cy="411480"/>
+          </a:xfrm>
+          <a:prstGeom prst="rect">
+            <a:avLst/>
+          </a:prstGeom>
+          <a:noFill/>
+        </p:spPr>
+        <p:txBody>
+          <a:bodyPr wrap="square">
+            <a:noAutofit/>
+          </a:bodyPr>
+          <a:lstStyle/>
+          <a:p>
+            <a:pPr>
+              <a:lnSpc>
+                <a:spcPts val="2200"/>
+              </a:lnSpc>
+            </a:pPr>
+            <a:r>
+              <a:rPr sz="1200" b="0">
+                <a:solidFill>
+                  <a:srgbClr val="333333"/>
+                </a:solidFill>
+                <a:latin typeface="Calibri"/>
+              </a:rPr>
+              <a:t>Croissance depuis D : ABC|DE, coupe 3</a:t>
+            </a:r>
+          </a:p>
+        </p:txBody>
+      </p:sp>
       <p:sp>
         <p:nvSpPr>
           <p:cNvPr id="5" name="TextBox 4"/>
@@ -5286,169 +5738,14 @@
                 </a:solidFill>
                 <a:latin typeface="Calibri"/>
               </a:rPr>
-              <a:t>La croissance dépend du nœud de départ</a:t>
-            </a:r>
-          </a:p>
-        </p:txBody>
-      </p:sp>
-      <p:sp>
-        <p:nvSpPr>
-          <p:cNvPr id="3" name="TextBox 2"/>
-          <p:cNvSpPr txBox="1"/>
-          <p:nvPr/>
-        </p:nvSpPr>
-        <p:spPr>
-          <a:xfrm>
-            <a:off x="548640" y="1234440"/>
-            <a:ext cx="5303520" cy="4754880"/>
-          </a:xfrm>
-          <a:prstGeom prst="rect">
-            <a:avLst/>
-          </a:prstGeom>
-          <a:noFill/>
-        </p:spPr>
-        <p:txBody>
-          <a:bodyPr wrap="square">
-            <a:noAutofit/>
-          </a:bodyPr>
-          <a:lstStyle/>
-          <a:p>
-            <a:pPr lvl="0" marL="457200" indent="-228600">
-              <a:buFont typeface="Calibri"/>
-              <a:spcAft>
-                <a:spcPts val="1000"/>
-              </a:spcAft>
-              <a:buSzPct val="100000"/>
-              <a:buChar char="•"/>
-              <a:lnSpc>
-                <a:spcPts val="2200"/>
-              </a:lnSpc>
-            </a:pPr>
-            <a:r>
-              <a:rPr sz="2000" b="0">
-                <a:solidFill>
-                  <a:srgbClr val="333333"/>
-                </a:solidFill>
-                <a:latin typeface="Calibri"/>
-              </a:rPr>
-              <a:t>La croissance n'a pas de hasard, mais elle a un choix : le nœud de départ</a:t>
-            </a:r>
-          </a:p>
-          <a:p>
-            <a:pPr lvl="0" marL="457200" indent="-228600">
-              <a:buFont typeface="Calibri"/>
-              <a:spcAft>
-                <a:spcPts val="1000"/>
-              </a:spcAft>
-              <a:buSzPct val="100000"/>
-              <a:buChar char="•"/>
-              <a:lnSpc>
-                <a:spcPts val="2200"/>
-              </a:lnSpc>
-            </a:pPr>
-            <a:r>
-              <a:rPr sz="2000" b="0">
-                <a:solidFill>
-                  <a:srgbClr val="333333"/>
-                </a:solidFill>
-                <a:latin typeface="Calibri"/>
-              </a:rPr>
-              <a:t>Partons de A au lieu de D</a:t>
-            </a:r>
-          </a:p>
-          <a:p>
-            <a:pPr lvl="0" marL="457200" indent="-228600">
-              <a:buFont typeface="Calibri"/>
-              <a:spcAft>
-                <a:spcPts val="1000"/>
-              </a:spcAft>
-              <a:buSzPct val="100000"/>
-              <a:buChar char="•"/>
-              <a:lnSpc>
-                <a:spcPts val="2200"/>
-              </a:lnSpc>
-            </a:pPr>
-            <a:r>
-              <a:rPr sz="2000" b="0">
-                <a:solidFill>
-                  <a:srgbClr val="333333"/>
-                </a:solidFill>
-                <a:latin typeface="Calibri"/>
-              </a:rPr>
-              <a:t>L'arête la plus lourde qui sort de A va vers B, avec un poids de cinq, donc B rejoint A</a:t>
-            </a:r>
-          </a:p>
-          <a:p>
-            <a:pPr lvl="0" marL="457200" indent="-228600">
-              <a:buFont typeface="Calibri"/>
-              <a:spcAft>
-                <a:spcPts val="1000"/>
-              </a:spcAft>
-              <a:buSzPct val="100000"/>
-              <a:buChar char="•"/>
-              <a:lnSpc>
-                <a:spcPts val="2200"/>
-              </a:lnSpc>
-            </a:pPr>
-            <a:r>
-              <a:rPr sz="2000" b="0">
-                <a:solidFill>
-                  <a:srgbClr val="333333"/>
-                </a:solidFill>
-                <a:latin typeface="Calibri"/>
-              </a:rPr>
-              <a:t>Avec deux cellules, le côté est plein, et il s'arrête</a:t>
-            </a:r>
-          </a:p>
-          <a:p>
-            <a:pPr lvl="0" marL="457200" indent="-228600">
-              <a:buFont typeface="Calibri"/>
-              <a:spcAft>
-                <a:spcPts val="1000"/>
-              </a:spcAft>
-              <a:buSzPct val="100000"/>
-              <a:buChar char="•"/>
-              <a:lnSpc>
-                <a:spcPts val="2200"/>
-              </a:lnSpc>
-            </a:pPr>
-            <a:r>
-              <a:rPr sz="2000" b="0">
-                <a:solidFill>
-                  <a:srgbClr val="333333"/>
-                </a:solidFill>
-                <a:latin typeface="Calibri"/>
-              </a:rPr>
-              <a:t>C, D et E forment l'autre côté, donc A–C et B–C sont coupées</a:t>
-            </a:r>
-          </a:p>
-          <a:p>
-            <a:pPr lvl="0" marL="457200" indent="-228600">
-              <a:buFont typeface="Calibri"/>
-              <a:spcAft>
-                <a:spcPts val="1000"/>
-              </a:spcAft>
-              <a:buSzPct val="100000"/>
-              <a:buChar char="•"/>
-              <a:lnSpc>
-                <a:spcPts val="2200"/>
-              </a:lnSpc>
-            </a:pPr>
-            <a:r>
-              <a:rPr sz="2000" b="0">
-                <a:solidFill>
-                  <a:srgbClr val="333333"/>
-                </a:solidFill>
-                <a:latin typeface="Calibri"/>
-              </a:rPr>
-              <a:t>Un plus quatre font cinq, ce qui est pire que trois</a:t>
+              <a:t>Les trois trouvent une coupe de 3. Coup de chance ?</a:t>
             </a:r>
           </a:p>
         </p:txBody>
       </p:sp>
       <p:pic>
         <p:nvPicPr>
-          <p:cNvPr id="4" name="Picture 3" descr="grow-a.png"/>
+          <p:cNvPr id="3" name="Picture 2" descr="05-takeaway.png"/>
           <p:cNvPicPr>
             <a:picLocks noChangeAspect="1"/>
           </p:cNvPicPr>
@@ -5462,14 +5759,53 @@
         </p:blipFill>
         <p:spPr>
           <a:xfrm>
-            <a:off x="6172200" y="1234440"/>
-            <a:ext cx="4733871" cy="4754879"/>
+            <a:off x="548640" y="1143000"/>
+            <a:ext cx="9183076" cy="4572000"/>
           </a:xfrm>
           <a:prstGeom prst="rect">
             <a:avLst/>
           </a:prstGeom>
         </p:spPr>
       </p:pic>
+      <p:sp>
+        <p:nvSpPr>
+          <p:cNvPr id="4" name="TextBox 3"/>
+          <p:cNvSpPr txBox="1"/>
+          <p:nvPr/>
+        </p:nvSpPr>
+        <p:spPr>
+          <a:xfrm>
+            <a:off x="548640" y="5897880"/>
+            <a:ext cx="11064240" cy="411480"/>
+          </a:xfrm>
+          <a:prstGeom prst="rect">
+            <a:avLst/>
+          </a:prstGeom>
+          <a:noFill/>
+        </p:spPr>
+        <p:txBody>
+          <a:bodyPr wrap="square">
+            <a:noAutofit/>
+          </a:bodyPr>
+          <a:lstStyle/>
+          <a:p>
+            <a:pPr>
+              <a:lnSpc>
+                <a:spcPts val="2200"/>
+              </a:lnSpc>
+            </a:pPr>
+            <a:r>
+              <a:rPr sz="1200" b="0">
+                <a:solidFill>
+                  <a:srgbClr val="333333"/>
+                </a:solidFill>
+                <a:latin typeface="Calibri"/>
+              </a:rPr>
+              <a:t>Les trois trouvent une coupe de 3. Coup de chance ?</a:t>
+            </a:r>
+          </a:p>
+        </p:txBody>
+      </p:sp>
       <p:sp>
         <p:nvSpPr>
           <p:cNvPr id="5" name="TextBox 4"/>
@@ -5561,7 +5897,7 @@
                 </a:solidFill>
                 <a:latin typeface="Calibri"/>
               </a:rPr>
-              <a:t>Garder le meilleur départ valide</a:t>
+              <a:t>Exemple détaillé : une graine malchanceuse</a:t>
             </a:r>
           </a:p>
         </p:txBody>
@@ -5575,7 +5911,7 @@
         <p:spPr>
           <a:xfrm>
             <a:off x="548640" y="1234440"/>
-            <a:ext cx="11064240" cy="4937760"/>
+            <a:ext cx="5303520" cy="4754880"/>
           </a:xfrm>
           <a:prstGeom prst="rect">
             <a:avLst/>
@@ -5606,7 +5942,7 @@
                 </a:solidFill>
                 <a:latin typeface="Calibri"/>
               </a:rPr>
-              <a:t>La solution est simple : ne jamais faire confiance à un seul départ</a:t>
+              <a:t>Un seul mélange malchanceux peut rendre la coupe plus de cinq fois pire</a:t>
             </a:r>
           </a:p>
           <a:p>
@@ -5628,7 +5964,7 @@
                 </a:solidFill>
                 <a:latin typeface="Calibri"/>
               </a:rPr>
-              <a:t>Construisez-en plusieurs : graines aléatoires, glouton, croissance depuis chaque nœud</a:t>
+              <a:t>Donc oui, c'était en partie de la chance</a:t>
             </a:r>
           </a:p>
           <a:p>
@@ -5650,80 +5986,38 @@
                 </a:solidFill>
                 <a:latin typeface="Calibri"/>
               </a:rPr>
-              <a:t>Jetez toute partition qui enfreint la règle de taille</a:t>
-            </a:r>
-          </a:p>
-          <a:p>
-            <a:pPr lvl="0" marL="457200" indent="-228600">
-              <a:buFont typeface="Calibri"/>
-              <a:spcAft>
-                <a:spcPts val="1000"/>
-              </a:spcAft>
-              <a:buSzPct val="100000"/>
-              <a:buChar char="•"/>
-              <a:lnSpc>
-                <a:spcPts val="2200"/>
-              </a:lnSpc>
-            </a:pPr>
-            <a:r>
-              <a:rPr sz="2000" b="0">
-                <a:solidFill>
-                  <a:srgbClr val="333333"/>
-                </a:solidFill>
-                <a:latin typeface="Calibri"/>
-              </a:rPr>
-              <a:t>Gardez celle dont la coupe est la plus petite</a:t>
-            </a:r>
-          </a:p>
-          <a:p>
-            <a:pPr lvl="0" marL="457200" indent="-228600">
-              <a:buFont typeface="Calibri"/>
-              <a:spcAft>
-                <a:spcPts val="1000"/>
-              </a:spcAft>
-              <a:buSzPct val="100000"/>
-              <a:buChar char="•"/>
-              <a:lnSpc>
-                <a:spcPts val="2200"/>
-              </a:lnSpc>
-            </a:pPr>
-            <a:r>
-              <a:rPr sz="2000" b="0">
-                <a:solidFill>
-                  <a:srgbClr val="333333"/>
-                </a:solidFill>
-                <a:latin typeface="Calibri"/>
-              </a:rPr>
-              <a:t>Ici, le glouton et les cinq croissances donnent trois, cinq, cinq, neuf, trois, trois</a:t>
-            </a:r>
-          </a:p>
-          <a:p>
-            <a:pPr lvl="0" marL="457200" indent="-228600">
-              <a:buFont typeface="Calibri"/>
-              <a:spcAft>
-                <a:spcPts val="1000"/>
-              </a:spcAft>
-              <a:buSzPct val="100000"/>
-              <a:buChar char="•"/>
-              <a:lnSpc>
-                <a:spcPts val="2200"/>
-              </a:lnSpc>
-            </a:pPr>
-            <a:r>
-              <a:rPr sz="2000" b="0">
-                <a:solidFill>
-                  <a:srgbClr val="333333"/>
-                </a:solidFill>
-                <a:latin typeface="Calibri"/>
-              </a:rPr>
-              <a:t>Le meilleur est trois : A, B et C contre D et E</a:t>
-            </a:r>
-          </a:p>
-        </p:txBody>
-      </p:sp>
-      <p:sp>
-        <p:nvSpPr>
-          <p:cNvPr id="4" name="TextBox 3"/>
+              <a:t>Avec la graine trois, B et D tombent d'un côté, et A, C et E de l'autre</a:t>
+            </a:r>
+          </a:p>
+        </p:txBody>
+      </p:sp>
+      <p:pic>
+        <p:nvPicPr>
+          <p:cNvPr id="4" name="Picture 3" descr="worked-unlucky-1.png"/>
+          <p:cNvPicPr>
+            <a:picLocks noChangeAspect="1"/>
+          </p:cNvPicPr>
+          <p:nvPr/>
+        </p:nvPicPr>
+        <p:blipFill>
+          <a:blip r:embed="rId2"/>
+          <a:stretch>
+            <a:fillRect/>
+          </a:stretch>
+        </p:blipFill>
+        <p:spPr>
+          <a:xfrm>
+            <a:off x="6172200" y="1234440"/>
+            <a:ext cx="4991147" cy="4754880"/>
+          </a:xfrm>
+          <a:prstGeom prst="rect">
+            <a:avLst/>
+          </a:prstGeom>
+        </p:spPr>
+      </p:pic>
+      <p:sp>
+        <p:nvSpPr>
+          <p:cNvPr id="5" name="TextBox 4"/>
           <p:cNvSpPr txBox="1"/>
           <p:nvPr/>
         </p:nvSpPr>
@@ -5812,7 +6106,7 @@
                 </a:solidFill>
                 <a:latin typeface="Calibri"/>
               </a:rPr>
-              <a:t>Garder le meilleur départ valide — à essayer</a:t>
+              <a:t>Additionner la coupe</a:t>
             </a:r>
           </a:p>
         </p:txBody>
@@ -5825,15 +6119,13 @@
         </p:nvSpPr>
         <p:spPr>
           <a:xfrm>
-            <a:off x="548640" y="1143000"/>
-            <a:ext cx="11064240" cy="5029200"/>
-          </a:xfrm>
-          <a:prstGeom prst="rect">
-            <a:avLst/>
-          </a:prstGeom>
-          <a:solidFill>
-            <a:srgbClr val="F4F4F4"/>
-          </a:solidFill>
+            <a:off x="548640" y="1234440"/>
+            <a:ext cx="5303520" cy="4754880"/>
+          </a:xfrm>
+          <a:prstGeom prst="rect">
+            <a:avLst/>
+          </a:prstGeom>
+          <a:noFill/>
         </p:spPr>
         <p:txBody>
           <a:bodyPr wrap="square">
@@ -5841,124 +6133,100 @@
           </a:bodyPr>
           <a:lstStyle/>
           <a:p>
-            <a:pPr>
-              <a:lnSpc>
-                <a:spcPts val="2200"/>
-              </a:lnSpc>
+            <a:pPr lvl="0" marL="457200" indent="-228600">
+              <a:buFont typeface="Calibri"/>
               <a:spcAft>
-                <a:spcPts val="400"/>
+                <a:spcPts val="1000"/>
               </a:spcAft>
+              <a:buSzPct val="100000"/>
+              <a:buChar char="•"/>
+              <a:lnSpc>
+                <a:spcPts val="2200"/>
+              </a:lnSpc>
             </a:pPr>
             <a:r>
               <a:rPr sz="2000" b="0">
                 <a:solidFill>
                   <a:srgbClr val="333333"/>
                 </a:solidFill>
-                <a:latin typeface="Consolas"/>
+                <a:latin typeface="Calibri"/>
               </a:rPr>
-              <a:t>best_start(graph):</a:t>
-            </a:r>
-          </a:p>
-          <a:p>
-            <a:pPr>
-              <a:lnSpc>
-                <a:spcPts val="2200"/>
-              </a:lnSpc>
+              <a:t>Additionnons la coupe, arête par arête</a:t>
+            </a:r>
+          </a:p>
+          <a:p>
+            <a:pPr lvl="0" marL="457200" indent="-228600">
+              <a:buFont typeface="Calibri"/>
               <a:spcAft>
-                <a:spcPts val="400"/>
+                <a:spcPts val="1000"/>
               </a:spcAft>
+              <a:buSzPct val="100000"/>
+              <a:buChar char="•"/>
+              <a:lnSpc>
+                <a:spcPts val="2200"/>
+              </a:lnSpc>
             </a:pPr>
             <a:r>
               <a:rPr sz="2000" b="0">
                 <a:solidFill>
                   <a:srgbClr val="333333"/>
                 </a:solidFill>
-                <a:latin typeface="Consolas"/>
+                <a:latin typeface="Calibri"/>
               </a:rPr>
-              <a:t>  starts = random(seed) pour quelques graines</a:t>
-            </a:r>
-          </a:p>
-          <a:p>
-            <a:pPr>
-              <a:lnSpc>
-                <a:spcPts val="2200"/>
-              </a:lnSpc>
+              <a:t>A–B cinq, B–C quatre, C–D deux, et D–E cinq</a:t>
+            </a:r>
+          </a:p>
+          <a:p>
+            <a:pPr lvl="0" marL="457200" indent="-228600">
+              <a:buFont typeface="Calibri"/>
               <a:spcAft>
-                <a:spcPts val="400"/>
+                <a:spcPts val="1000"/>
               </a:spcAft>
+              <a:buSzPct val="100000"/>
+              <a:buChar char="•"/>
+              <a:lnSpc>
+                <a:spcPts val="2200"/>
+              </a:lnSpc>
             </a:pPr>
             <a:r>
               <a:rPr sz="2000" b="0">
                 <a:solidFill>
                   <a:srgbClr val="333333"/>
                 </a:solidFill>
-                <a:latin typeface="Consolas"/>
+                <a:latin typeface="Calibri"/>
               </a:rPr>
-              <a:t>         + greedy</a:t>
-            </a:r>
-          </a:p>
-          <a:p>
-            <a:pPr>
-              <a:lnSpc>
-                <a:spcPts val="2200"/>
-              </a:lnSpc>
-              <a:spcAft>
-                <a:spcPts val="400"/>
-              </a:spcAft>
-            </a:pPr>
-            <a:r>
-              <a:rPr sz="2000" b="0">
-                <a:solidFill>
-                  <a:srgbClr val="333333"/>
-                </a:solidFill>
-                <a:latin typeface="Consolas"/>
-              </a:rPr>
-              <a:t>         + grow(x) pour chaque nœud x</a:t>
-            </a:r>
-          </a:p>
-          <a:p>
-            <a:pPr>
-              <a:lnSpc>
-                <a:spcPts val="2200"/>
-              </a:lnSpc>
-              <a:spcAft>
-                <a:spcPts val="400"/>
-              </a:spcAft>
-            </a:pPr>
-            <a:r>
-              <a:rPr sz="2000" b="0">
-                <a:solidFill>
-                  <a:srgbClr val="333333"/>
-                </a:solidFill>
-                <a:latin typeface="Consolas"/>
-              </a:rPr>
-              <a:t>  jeter chaque départ qui n'est pas valide</a:t>
-            </a:r>
-          </a:p>
-          <a:p>
-            <a:pPr>
-              <a:lnSpc>
-                <a:spcPts val="2200"/>
-              </a:lnSpc>
-              <a:spcAft>
-                <a:spcPts val="400"/>
-              </a:spcAft>
-            </a:pPr>
-            <a:r>
-              <a:rPr sz="2000" b="0">
-                <a:solidFill>
-                  <a:srgbClr val="333333"/>
-                </a:solidFill>
-                <a:latin typeface="Consolas"/>
-              </a:rPr>
-              <a:t>  renvoyer le départ de plus petite taille de coupe</a:t>
-            </a:r>
-          </a:p>
-        </p:txBody>
-      </p:sp>
-      <p:sp>
-        <p:nvSpPr>
-          <p:cNvPr id="4" name="TextBox 3"/>
+              <a:t>Cela fait seize</a:t>
+            </a:r>
+          </a:p>
+        </p:txBody>
+      </p:sp>
+      <p:pic>
+        <p:nvPicPr>
+          <p:cNvPr id="4" name="Picture 3" descr="worked-unlucky-2.png"/>
+          <p:cNvPicPr>
+            <a:picLocks noChangeAspect="1"/>
+          </p:cNvPicPr>
+          <p:nvPr/>
+        </p:nvPicPr>
+        <p:blipFill>
+          <a:blip r:embed="rId2"/>
+          <a:stretch>
+            <a:fillRect/>
+          </a:stretch>
+        </p:blipFill>
+        <p:spPr>
+          <a:xfrm>
+            <a:off x="6172200" y="1234440"/>
+            <a:ext cx="4991147" cy="4754880"/>
+          </a:xfrm>
+          <a:prstGeom prst="rect">
+            <a:avLst/>
+          </a:prstGeom>
+        </p:spPr>
+      </p:pic>
+      <p:sp>
+        <p:nvSpPr>
+          <p:cNvPr id="5" name="TextBox 4"/>
           <p:cNvSpPr txBox="1"/>
           <p:nvPr/>
         </p:nvSpPr>
@@ -6047,7 +6315,7 @@
                 </a:solidFill>
                 <a:latin typeface="Calibri"/>
               </a:rPr>
-              <a:t>Une limite de taille garde la partition valide</a:t>
+              <a:t>La pire partition valide</a:t>
             </a:r>
           </a:p>
         </p:txBody>
@@ -6092,7 +6360,7 @@
                 </a:solidFill>
                 <a:latin typeface="Calibri"/>
               </a:rPr>
-              <a:t>Voici une étoile : A est au milieu, relié à toutes les autres cellules</a:t>
+              <a:t>Les deux arêtes lourdes sont coupées : c'est la pire partition valide qui existe</a:t>
             </a:r>
           </a:p>
           <a:p>
@@ -6114,7 +6382,7 @@
                 </a:solidFill>
                 <a:latin typeface="Calibri"/>
               </a:rPr>
-              <a:t>A–B pèse neuf, et les quatre autres arêtes pèsent cinq</a:t>
+              <a:t>Sur seize graines, la coupe va de trois à seize</a:t>
             </a:r>
           </a:p>
           <a:p>
@@ -6136,80 +6404,14 @@
                 </a:solidFill>
                 <a:latin typeface="Calibri"/>
               </a:rPr>
-              <a:t>Avec six cellules, chaque côté doit en contenir exactement trois</a:t>
-            </a:r>
-          </a:p>
-          <a:p>
-            <a:pPr lvl="0" marL="457200" indent="-228600">
-              <a:buFont typeface="Calibri"/>
-              <a:spcAft>
-                <a:spcPts val="1000"/>
-              </a:spcAft>
-              <a:buSzPct val="100000"/>
-              <a:buChar char="•"/>
-              <a:lnSpc>
-                <a:spcPts val="2200"/>
-              </a:lnSpc>
-            </a:pPr>
-            <a:r>
-              <a:rPr sz="2000" b="0">
-                <a:solidFill>
-                  <a:srgbClr val="333333"/>
-                </a:solidFill>
-                <a:latin typeface="Calibri"/>
-              </a:rPr>
-              <a:t>Un ancien glouton sans limite de taille ajoutait toujours des cellules près de A</a:t>
-            </a:r>
-          </a:p>
-          <a:p>
-            <a:pPr lvl="0" marL="457200" indent="-228600">
-              <a:buFont typeface="Calibri"/>
-              <a:spcAft>
-                <a:spcPts val="1000"/>
-              </a:spcAft>
-              <a:buSzPct val="100000"/>
-              <a:buChar char="•"/>
-              <a:lnSpc>
-                <a:spcPts val="2200"/>
-              </a:lnSpc>
-            </a:pPr>
-            <a:r>
-              <a:rPr sz="2000" b="0">
-                <a:solidFill>
-                  <a:srgbClr val="333333"/>
-                </a:solidFill>
-                <a:latin typeface="Calibri"/>
-              </a:rPr>
-              <a:t>Il finissait avec cinq cellules contre une : coupe cinq, mais pas valide</a:t>
-            </a:r>
-          </a:p>
-          <a:p>
-            <a:pPr lvl="0" marL="457200" indent="-228600">
-              <a:buFont typeface="Calibri"/>
-              <a:spcAft>
-                <a:spcPts val="1000"/>
-              </a:spcAft>
-              <a:buSzPct val="100000"/>
-              <a:buChar char="•"/>
-              <a:lnSpc>
-                <a:spcPts val="2200"/>
-              </a:lnSpc>
-            </a:pPr>
-            <a:r>
-              <a:rPr sz="2000" b="0">
-                <a:solidFill>
-                  <a:srgbClr val="333333"/>
-                </a:solidFill>
-                <a:latin typeface="Calibri"/>
-              </a:rPr>
-              <a:t>Notre glouton arrête chaque côté à trois cellules, et obtient quinze</a:t>
+              <a:t>Seules trois de ces graines trouvent la meilleure coupe, trois</a:t>
             </a:r>
           </a:p>
         </p:txBody>
       </p:sp>
       <p:pic>
         <p:nvPicPr>
-          <p:cNvPr id="4" name="Picture 3" descr="star-cap.png"/>
+          <p:cNvPr id="4" name="Picture 3" descr="worked-unlucky.png"/>
           <p:cNvPicPr>
             <a:picLocks noChangeAspect="1"/>
           </p:cNvPicPr>
@@ -6224,7 +6426,7 @@
         <p:spPr>
           <a:xfrm>
             <a:off x="6172200" y="1234440"/>
-            <a:ext cx="3733215" cy="4754879"/>
+            <a:ext cx="4991147" cy="4754880"/>
           </a:xfrm>
           <a:prstGeom prst="rect">
             <a:avLst/>
@@ -6322,7 +6524,7 @@
                 </a:solidFill>
                 <a:latin typeface="Calibri"/>
               </a:rPr>
-              <a:t>Une égalité peut décider du résultat</a:t>
+              <a:t>La croissance dépend du nœud de départ</a:t>
             </a:r>
           </a:p>
         </p:txBody>
@@ -6367,7 +6569,7 @@
                 </a:solidFill>
                 <a:latin typeface="Calibri"/>
               </a:rPr>
-              <a:t>Dans ce graphe, A–B et D–E pèsent de nouveau cinq toutes les deux</a:t>
+              <a:t>La croissance n'a pas de hasard, mais elle a un choix : le nœud de départ</a:t>
             </a:r>
           </a:p>
           <a:p>
@@ -6389,102 +6591,14 @@
                 </a:solidFill>
                 <a:latin typeface="Calibri"/>
               </a:rPr>
-              <a:t>Le glouton doit en choisir une pour démarrer</a:t>
-            </a:r>
-          </a:p>
-          <a:p>
-            <a:pPr lvl="0" marL="457200" indent="-228600">
-              <a:buFont typeface="Calibri"/>
-              <a:spcAft>
-                <a:spcPts val="1000"/>
-              </a:spcAft>
-              <a:buSzPct val="100000"/>
-              <a:buChar char="•"/>
-              <a:lnSpc>
-                <a:spcPts val="2200"/>
-              </a:lnSpc>
-            </a:pPr>
-            <a:r>
-              <a:rPr sz="2000" b="0">
-                <a:solidFill>
-                  <a:srgbClr val="333333"/>
-                </a:solidFill>
-                <a:latin typeface="Calibri"/>
-              </a:rPr>
-              <a:t>La règle prend le plus petit nom, A–B, et cela donne une taille de coupe de neuf</a:t>
-            </a:r>
-          </a:p>
-          <a:p>
-            <a:pPr lvl="0" marL="457200" indent="-228600">
-              <a:buFont typeface="Calibri"/>
-              <a:spcAft>
-                <a:spcPts val="1000"/>
-              </a:spcAft>
-              <a:buSzPct val="100000"/>
-              <a:buChar char="•"/>
-              <a:lnSpc>
-                <a:spcPts val="2200"/>
-              </a:lnSpc>
-            </a:pPr>
-            <a:r>
-              <a:rPr sz="2000" b="0">
-                <a:solidFill>
-                  <a:srgbClr val="333333"/>
-                </a:solidFill>
-                <a:latin typeface="Calibri"/>
-              </a:rPr>
-              <a:t>Démarrer de D–E donne une taille de coupe de quatre</a:t>
-            </a:r>
-          </a:p>
-          <a:p>
-            <a:pPr lvl="0" marL="457200" indent="-228600">
-              <a:buFont typeface="Calibri"/>
-              <a:spcAft>
-                <a:spcPts val="1000"/>
-              </a:spcAft>
-              <a:buSzPct val="100000"/>
-              <a:buChar char="•"/>
-              <a:lnSpc>
-                <a:spcPts val="2200"/>
-              </a:lnSpc>
-            </a:pPr>
-            <a:r>
-              <a:rPr sz="2000" b="0">
-                <a:solidFill>
-                  <a:srgbClr val="333333"/>
-                </a:solidFill>
-                <a:latin typeface="Calibri"/>
-              </a:rPr>
-              <a:t>Une simple règle de départage a donc plus que doublé la coupe</a:t>
-            </a:r>
-          </a:p>
-          <a:p>
-            <a:pPr lvl="0" marL="457200" indent="-228600">
-              <a:buFont typeface="Calibri"/>
-              <a:spcAft>
-                <a:spcPts val="1000"/>
-              </a:spcAft>
-              <a:buSzPct val="100000"/>
-              <a:buChar char="•"/>
-              <a:lnSpc>
-                <a:spcPts val="2200"/>
-              </a:lnSpc>
-            </a:pPr>
-            <a:r>
-              <a:rPr sz="2000" b="0">
-                <a:solidFill>
-                  <a:srgbClr val="333333"/>
-                </a:solidFill>
-                <a:latin typeface="Calibri"/>
-              </a:rPr>
-              <a:t>La croissance depuis C trouve aussi quatre, une raison de plus d'essayer plusieurs départs</a:t>
+              <a:t>Partons de A au lieu de D</a:t>
             </a:r>
           </a:p>
         </p:txBody>
       </p:sp>
       <p:pic>
         <p:nvPicPr>
-          <p:cNvPr id="4" name="Picture 3" descr="tie-graph.png"/>
+          <p:cNvPr id="4" name="Picture 3" descr="grow-a-1.png"/>
           <p:cNvPicPr>
             <a:picLocks noChangeAspect="1"/>
           </p:cNvPicPr>
@@ -6499,7 +6613,7 @@
         <p:spPr>
           <a:xfrm>
             <a:off x="6172200" y="1234440"/>
-            <a:ext cx="4007853" cy="4754879"/>
+            <a:ext cx="4733871" cy="4754879"/>
           </a:xfrm>
           <a:prstGeom prst="rect">
             <a:avLst/>
@@ -6597,7 +6711,7 @@
                 </a:solidFill>
                 <a:latin typeface="Calibri"/>
               </a:rPr>
-              <a:t>Le fil le plus lourd n'est pas toujours à l'intérieur</a:t>
+              <a:t>Croissance depuis A, étape par étape</a:t>
             </a:r>
           </a:p>
         </p:txBody>
@@ -6642,7 +6756,7 @@
                 </a:solidFill>
                 <a:latin typeface="Calibri"/>
               </a:rPr>
-              <a:t>Voici deux triangles, reliés par un seul pont, C–D, de poids quatre</a:t>
+              <a:t>L'arête la plus lourde qui sort de A va vers B, avec un poids de cinq, donc B rejoint A</a:t>
             </a:r>
           </a:p>
           <a:p>
@@ -6664,102 +6778,14 @@
                 </a:solidFill>
                 <a:latin typeface="Calibri"/>
               </a:rPr>
-              <a:t>Chaque arête de triangle pèse trois</a:t>
-            </a:r>
-          </a:p>
-          <a:p>
-            <a:pPr lvl="0" marL="457200" indent="-228600">
-              <a:buFont typeface="Calibri"/>
-              <a:spcAft>
-                <a:spcPts val="1000"/>
-              </a:spcAft>
-              <a:buSzPct val="100000"/>
-              <a:buChar char="•"/>
-              <a:lnSpc>
-                <a:spcPts val="2200"/>
-              </a:lnSpc>
-            </a:pPr>
-            <a:r>
-              <a:rPr sz="2000" b="0">
-                <a:solidFill>
-                  <a:srgbClr val="333333"/>
-                </a:solidFill>
-                <a:latin typeface="Calibri"/>
-              </a:rPr>
-              <a:t>La coupe naturelle met un triangle de chaque côté, et ne coupe que le pont</a:t>
-            </a:r>
-          </a:p>
-          <a:p>
-            <a:pPr lvl="0" marL="457200" indent="-228600">
-              <a:buFont typeface="Calibri"/>
-              <a:spcAft>
-                <a:spcPts val="1000"/>
-              </a:spcAft>
-              <a:buSzPct val="100000"/>
-              <a:buChar char="•"/>
-              <a:lnSpc>
-                <a:spcPts val="2200"/>
-              </a:lnSpc>
-            </a:pPr>
-            <a:r>
-              <a:rPr sz="2000" b="0">
-                <a:solidFill>
-                  <a:srgbClr val="333333"/>
-                </a:solidFill>
-                <a:latin typeface="Calibri"/>
-              </a:rPr>
-              <a:t>Mais le glouton démarre de l'arête la plus lourde, et ici c'est le pont lui-même</a:t>
-            </a:r>
-          </a:p>
-          <a:p>
-            <a:pPr lvl="0" marL="457200" indent="-228600">
-              <a:buFont typeface="Calibri"/>
-              <a:spcAft>
-                <a:spcPts val="1000"/>
-              </a:spcAft>
-              <a:buSzPct val="100000"/>
-              <a:buChar char="•"/>
-              <a:lnSpc>
-                <a:spcPts val="2200"/>
-              </a:lnSpc>
-            </a:pPr>
-            <a:r>
-              <a:rPr sz="2000" b="0">
-                <a:solidFill>
-                  <a:srgbClr val="333333"/>
-                </a:solidFill>
-                <a:latin typeface="Calibri"/>
-              </a:rPr>
-              <a:t>C et D commencent donc du même côté, et la coupe finit à douze</a:t>
-            </a:r>
-          </a:p>
-          <a:p>
-            <a:pPr lvl="0" marL="457200" indent="-228600">
-              <a:buFont typeface="Calibri"/>
-              <a:spcAft>
-                <a:spcPts val="1000"/>
-              </a:spcAft>
-              <a:buSzPct val="100000"/>
-              <a:buChar char="•"/>
-              <a:lnSpc>
-                <a:spcPts val="2200"/>
-              </a:lnSpc>
-            </a:pPr>
-            <a:r>
-              <a:rPr sz="2000" b="0">
-                <a:solidFill>
-                  <a:srgbClr val="333333"/>
-                </a:solidFill>
-                <a:latin typeface="Calibri"/>
-              </a:rPr>
-              <a:t>La croissance depuis A garde son triangle ensemble et ne coupe que le pont : quatre</a:t>
+              <a:t>Avec deux cellules, le côté est plein, et il s'arrête</a:t>
             </a:r>
           </a:p>
         </p:txBody>
       </p:sp>
       <p:pic>
         <p:nvPicPr>
-          <p:cNvPr id="4" name="Picture 3" descr="bridge-graph.png"/>
+          <p:cNvPr id="4" name="Picture 3" descr="grow-a-2.png"/>
           <p:cNvPicPr>
             <a:picLocks noChangeAspect="1"/>
           </p:cNvPicPr>
@@ -6774,7 +6800,7 @@
         <p:spPr>
           <a:xfrm>
             <a:off x="6172200" y="1234440"/>
-            <a:ext cx="4007853" cy="4754879"/>
+            <a:ext cx="4733871" cy="4754879"/>
           </a:xfrm>
           <a:prstGeom prst="rect">
             <a:avLst/>
@@ -6872,14 +6898,103 @@
                 </a:solidFill>
                 <a:latin typeface="Calibri"/>
               </a:rPr>
-              <a:t>Parcours lab dans le navigateur</a:t>
+              <a:t>Croissance depuis A : AB|CDE, coupe 5</a:t>
+            </a:r>
+          </a:p>
+        </p:txBody>
+      </p:sp>
+      <p:sp>
+        <p:nvSpPr>
+          <p:cNvPr id="3" name="TextBox 2"/>
+          <p:cNvSpPr txBox="1"/>
+          <p:nvPr/>
+        </p:nvSpPr>
+        <p:spPr>
+          <a:xfrm>
+            <a:off x="548640" y="1234440"/>
+            <a:ext cx="5303520" cy="4754880"/>
+          </a:xfrm>
+          <a:prstGeom prst="rect">
+            <a:avLst/>
+          </a:prstGeom>
+          <a:noFill/>
+        </p:spPr>
+        <p:txBody>
+          <a:bodyPr wrap="square">
+            <a:noAutofit/>
+          </a:bodyPr>
+          <a:lstStyle/>
+          <a:p>
+            <a:pPr lvl="0" marL="457200" indent="-228600">
+              <a:buFont typeface="Calibri"/>
+              <a:spcAft>
+                <a:spcPts val="1000"/>
+              </a:spcAft>
+              <a:buSzPct val="100000"/>
+              <a:buChar char="•"/>
+              <a:lnSpc>
+                <a:spcPts val="2200"/>
+              </a:lnSpc>
+            </a:pPr>
+            <a:r>
+              <a:rPr sz="2000" b="0">
+                <a:solidFill>
+                  <a:srgbClr val="333333"/>
+                </a:solidFill>
+                <a:latin typeface="Calibri"/>
+              </a:rPr>
+              <a:t>C, D et E forment l'autre côté, donc A–C et B–C sont coupées</a:t>
+            </a:r>
+          </a:p>
+          <a:p>
+            <a:pPr lvl="0" marL="457200" indent="-228600">
+              <a:buFont typeface="Calibri"/>
+              <a:spcAft>
+                <a:spcPts val="1000"/>
+              </a:spcAft>
+              <a:buSzPct val="100000"/>
+              <a:buChar char="•"/>
+              <a:lnSpc>
+                <a:spcPts val="2200"/>
+              </a:lnSpc>
+            </a:pPr>
+            <a:r>
+              <a:rPr sz="2000" b="0">
+                <a:solidFill>
+                  <a:srgbClr val="333333"/>
+                </a:solidFill>
+                <a:latin typeface="Calibri"/>
+              </a:rPr>
+              <a:t>Un plus quatre font cinq, ce qui est pire que trois</a:t>
+            </a:r>
+          </a:p>
+          <a:p>
+            <a:pPr lvl="0" marL="457200" indent="-228600">
+              <a:buFont typeface="Calibri"/>
+              <a:spcAft>
+                <a:spcPts val="1000"/>
+              </a:spcAft>
+              <a:buSzPct val="100000"/>
+              <a:buChar char="•"/>
+              <a:lnSpc>
+                <a:spcPts val="2200"/>
+              </a:lnSpc>
+            </a:pPr>
+            <a:r>
+              <a:rPr sz="2000" b="0">
+                <a:solidFill>
+                  <a:srgbClr val="333333"/>
+                </a:solidFill>
+                <a:latin typeface="Calibri"/>
+              </a:rPr>
+              <a:t>Partir de C est encore pire : une coupe de neuf</a:t>
             </a:r>
           </a:p>
         </p:txBody>
       </p:sp>
       <p:pic>
         <p:nvPicPr>
-          <p:cNvPr id="3" name="Picture 2" descr="lab-starter.png"/>
+          <p:cNvPr id="4" name="Picture 3" descr="grow-a.png"/>
           <p:cNvPicPr>
             <a:picLocks noChangeAspect="1"/>
           </p:cNvPicPr>
@@ -6893,53 +7008,14 @@
         </p:blipFill>
         <p:spPr>
           <a:xfrm>
-            <a:off x="548640" y="1143000"/>
-            <a:ext cx="5418666" cy="4571999"/>
+            <a:off x="6172200" y="1234440"/>
+            <a:ext cx="4733871" cy="4754879"/>
           </a:xfrm>
           <a:prstGeom prst="rect">
             <a:avLst/>
           </a:prstGeom>
         </p:spPr>
       </p:pic>
-      <p:sp>
-        <p:nvSpPr>
-          <p:cNvPr id="4" name="TextBox 3"/>
-          <p:cNvSpPr txBox="1"/>
-          <p:nvPr/>
-        </p:nvSpPr>
-        <p:spPr>
-          <a:xfrm>
-            <a:off x="548640" y="5897880"/>
-            <a:ext cx="11064240" cy="411480"/>
-          </a:xfrm>
-          <a:prstGeom prst="rect">
-            <a:avLst/>
-          </a:prstGeom>
-          <a:noFill/>
-        </p:spPr>
-        <p:txBody>
-          <a:bodyPr wrap="square">
-            <a:noAutofit/>
-          </a:bodyPr>
-          <a:lstStyle/>
-          <a:p>
-            <a:pPr>
-              <a:lnSpc>
-                <a:spcPts val="2200"/>
-              </a:lnSpc>
-            </a:pPr>
-            <a:r>
-              <a:rPr sz="1200" b="0">
-                <a:solidFill>
-                  <a:srgbClr val="333333"/>
-                </a:solidFill>
-                <a:latin typeface="Calibri"/>
-              </a:rPr>
-              <a:t>Lab dans le navigateur, état de départ</a:t>
-            </a:r>
-          </a:p>
-        </p:txBody>
-      </p:sp>
       <p:sp>
         <p:nvSpPr>
           <p:cNvPr id="5" name="TextBox 4"/>
@@ -7031,45 +7107,21 @@
                 </a:solidFill>
                 <a:latin typeface="Calibri"/>
               </a:rPr>
-              <a:t>Parcours implémentation</a:t>
-            </a:r>
-          </a:p>
-        </p:txBody>
-      </p:sp>
-      <p:pic>
-        <p:nvPicPr>
-          <p:cNvPr id="3" name="Picture 2" descr="real-shell.png"/>
-          <p:cNvPicPr>
-            <a:picLocks noChangeAspect="1"/>
-          </p:cNvPicPr>
-          <p:nvPr/>
-        </p:nvPicPr>
-        <p:blipFill>
-          <a:blip r:embed="rId2"/>
-          <a:stretch>
-            <a:fillRect/>
-          </a:stretch>
-        </p:blipFill>
-        <p:spPr>
-          <a:xfrm>
-            <a:off x="548640" y="1143000"/>
-            <a:ext cx="9160625" cy="4572000"/>
-          </a:xfrm>
-          <a:prstGeom prst="rect">
-            <a:avLst/>
-          </a:prstGeom>
-        </p:spPr>
-      </p:pic>
-      <p:sp>
-        <p:nvSpPr>
-          <p:cNvPr id="4" name="TextBox 3"/>
+              <a:t>Garder le meilleur départ valide</a:t>
+            </a:r>
+          </a:p>
+        </p:txBody>
+      </p:sp>
+      <p:sp>
+        <p:nvSpPr>
+          <p:cNvPr id="3" name="TextBox 2"/>
           <p:cNvSpPr txBox="1"/>
           <p:nvPr/>
         </p:nvSpPr>
         <p:spPr>
           <a:xfrm>
-            <a:off x="548640" y="5897880"/>
-            <a:ext cx="11064240" cy="411480"/>
+            <a:off x="548640" y="1234440"/>
+            <a:ext cx="11064240" cy="4937760"/>
           </a:xfrm>
           <a:prstGeom prst="rect">
             <a:avLst/>
@@ -7082,26 +7134,142 @@
           </a:bodyPr>
           <a:lstStyle/>
           <a:p>
-            <a:pPr>
-              <a:lnSpc>
-                <a:spcPts val="2200"/>
-              </a:lnSpc>
-            </a:pPr>
-            <a:r>
-              <a:rPr sz="1200" b="0">
+            <a:pPr lvl="0" marL="457200" indent="-228600">
+              <a:buFont typeface="Calibri"/>
+              <a:spcAft>
+                <a:spcPts val="1000"/>
+              </a:spcAft>
+              <a:buSzPct val="100000"/>
+              <a:buChar char="•"/>
+              <a:lnSpc>
+                <a:spcPts val="2200"/>
+              </a:lnSpc>
+            </a:pPr>
+            <a:r>
+              <a:rPr sz="2000" b="0">
                 <a:solidFill>
                   <a:srgbClr val="333333"/>
                 </a:solidFill>
                 <a:latin typeface="Calibri"/>
               </a:rPr>
-              <a:t>Une vraie session de terminal</a:t>
-            </a:r>
-          </a:p>
-        </p:txBody>
-      </p:sp>
-      <p:sp>
-        <p:nvSpPr>
-          <p:cNvPr id="5" name="TextBox 4"/>
+              <a:t>La solution est simple : essayer plusieurs départs, garder le meilleur</a:t>
+            </a:r>
+          </a:p>
+          <a:p>
+            <a:pPr lvl="0" marL="457200" indent="-228600">
+              <a:buFont typeface="Calibri"/>
+              <a:spcAft>
+                <a:spcPts val="1000"/>
+              </a:spcAft>
+              <a:buSzPct val="100000"/>
+              <a:buChar char="•"/>
+              <a:lnSpc>
+                <a:spcPts val="2200"/>
+              </a:lnSpc>
+            </a:pPr>
+            <a:r>
+              <a:rPr sz="2000" b="0">
+                <a:solidFill>
+                  <a:srgbClr val="333333"/>
+                </a:solidFill>
+                <a:latin typeface="Calibri"/>
+              </a:rPr>
+              <a:t>Construisez quelques graines aléatoires, le glouton, et la croissance depuis chaque nœud</a:t>
+            </a:r>
+          </a:p>
+          <a:p>
+            <a:pPr lvl="0" marL="457200" indent="-228600">
+              <a:buFont typeface="Calibri"/>
+              <a:spcAft>
+                <a:spcPts val="1000"/>
+              </a:spcAft>
+              <a:buSzPct val="100000"/>
+              <a:buChar char="•"/>
+              <a:lnSpc>
+                <a:spcPts val="2200"/>
+              </a:lnSpc>
+            </a:pPr>
+            <a:r>
+              <a:rPr sz="2000" b="0">
+                <a:solidFill>
+                  <a:srgbClr val="333333"/>
+                </a:solidFill>
+                <a:latin typeface="Calibri"/>
+              </a:rPr>
+              <a:t>Jetez toute partition qui enfreint la règle de taille, puis gardez la plus petite coupe</a:t>
+            </a:r>
+          </a:p>
+          <a:p>
+            <a:pPr lvl="0" marL="457200" indent="-228600">
+              <a:buFont typeface="Calibri"/>
+              <a:spcAft>
+                <a:spcPts val="1000"/>
+              </a:spcAft>
+              <a:buSzPct val="100000"/>
+              <a:buChar char="•"/>
+              <a:lnSpc>
+                <a:spcPts val="2200"/>
+              </a:lnSpc>
+            </a:pPr>
+            <a:r>
+              <a:rPr sz="2000" b="0">
+                <a:solidFill>
+                  <a:srgbClr val="333333"/>
+                </a:solidFill>
+                <a:latin typeface="Calibri"/>
+              </a:rPr>
+              <a:t>Ici, le glouton et les cinq croissances donnent trois, cinq, cinq, neuf, trois et trois</a:t>
+            </a:r>
+          </a:p>
+          <a:p>
+            <a:pPr lvl="0" marL="457200" indent="-228600">
+              <a:buFont typeface="Calibri"/>
+              <a:spcAft>
+                <a:spcPts val="1000"/>
+              </a:spcAft>
+              <a:buSzPct val="100000"/>
+              <a:buChar char="•"/>
+              <a:lnSpc>
+                <a:spcPts val="2200"/>
+              </a:lnSpc>
+            </a:pPr>
+            <a:r>
+              <a:rPr sz="2000" b="0">
+                <a:solidFill>
+                  <a:srgbClr val="333333"/>
+                </a:solidFill>
+                <a:latin typeface="Calibri"/>
+              </a:rPr>
+              <a:t>Le meilleur est donc trois : A, B et C contre D et E</a:t>
+            </a:r>
+          </a:p>
+          <a:p>
+            <a:pPr lvl="0" marL="457200" indent="-228600">
+              <a:buFont typeface="Calibri"/>
+              <a:spcAft>
+                <a:spcPts val="1000"/>
+              </a:spcAft>
+              <a:buSzPct val="100000"/>
+              <a:buChar char="•"/>
+              <a:lnSpc>
+                <a:spcPts val="2200"/>
+              </a:lnSpc>
+            </a:pPr>
+            <a:r>
+              <a:rPr sz="2000" b="0">
+                <a:solidFill>
+                  <a:srgbClr val="333333"/>
+                </a:solidFill>
+                <a:latin typeface="Calibri"/>
+              </a:rPr>
+              <a:t>Faites une pause et devinez : une coupe plus petite peut-elle être le mauvais choix ?</a:t>
+            </a:r>
+          </a:p>
+        </p:txBody>
+      </p:sp>
+      <p:sp>
+        <p:nvSpPr>
+          <p:cNvPr id="4" name="TextBox 3"/>
           <p:cNvSpPr txBox="1"/>
           <p:nvPr/>
         </p:nvSpPr>
@@ -7190,7 +7358,7 @@
                 </a:solidFill>
                 <a:latin typeface="Calibri"/>
               </a:rPr>
-              <a:t>Parcours implémentation — à essayer</a:t>
+              <a:t>Garder le meilleur départ valide — à essayer</a:t>
             </a:r>
           </a:p>
         </p:txBody>
@@ -7234,7 +7402,7 @@
                 </a:solidFill>
                 <a:latin typeface="Consolas"/>
               </a:rPr>
-              <a:t># afficher toutes les bonnes réponses</a:t>
+              <a:t>best_start(graph):</a:t>
             </a:r>
           </a:p>
           <a:p>
@@ -7253,7 +7421,7 @@
                 </a:solidFill>
                 <a:latin typeface="Consolas"/>
               </a:rPr>
-              <a:t>python3 examples/initial_bipartition_check.py --show</a:t>
+              <a:t>  starts = random(seed) pour quelques graines</a:t>
             </a:r>
           </a:p>
           <a:p>
@@ -7272,7 +7440,7 @@
                 </a:solidFill>
                 <a:latin typeface="Consolas"/>
               </a:rPr>
-              <a:t/>
+              <a:t>         + greedy</a:t>
             </a:r>
           </a:p>
           <a:p>
@@ -7291,7 +7459,7 @@
                 </a:solidFill>
                 <a:latin typeface="Consolas"/>
               </a:rPr>
-              <a:t># vérifier vos propres fonctions</a:t>
+              <a:t>         + grow(x) pour chaque nœud x</a:t>
             </a:r>
           </a:p>
           <a:p>
@@ -7310,7 +7478,26 @@
                 </a:solidFill>
                 <a:latin typeface="Consolas"/>
               </a:rPr>
-              <a:t>python3 examples/initial_bipartition_check.py --impl my_init.py</a:t>
+              <a:t>  jeter chaque départ qui n'est pas valide</a:t>
+            </a:r>
+          </a:p>
+          <a:p>
+            <a:pPr>
+              <a:lnSpc>
+                <a:spcPts val="2200"/>
+              </a:lnSpc>
+              <a:spcAft>
+                <a:spcPts val="400"/>
+              </a:spcAft>
+            </a:pPr>
+            <a:r>
+              <a:rPr sz="2000" b="0">
+                <a:solidFill>
+                  <a:srgbClr val="333333"/>
+                </a:solidFill>
+                <a:latin typeface="Consolas"/>
+              </a:rPr>
+              <a:t>  renvoyer le départ de plus petite taille de coupe</a:t>
             </a:r>
           </a:p>
         </p:txBody>
@@ -7473,7 +7660,7 @@
                 </a:solidFill>
                 <a:latin typeface="Calibri"/>
               </a:rPr>
-              <a:t>On dessine chaque cellule comme un point, appelé nœud</a:t>
+              <a:t>Notre exemple a cinq cellules, nommées de A à E</a:t>
             </a:r>
           </a:p>
           <a:p>
@@ -7495,80 +7682,14 @@
                 </a:solidFill>
                 <a:latin typeface="Calibri"/>
               </a:rPr>
-              <a:t>Un trait entre deux nœuds est une arête : les deux cellules sont reliées</a:t>
-            </a:r>
-          </a:p>
-          <a:p>
-            <a:pPr lvl="0" marL="457200" indent="-228600">
-              <a:buFont typeface="Calibri"/>
-              <a:spcAft>
-                <a:spcPts val="1000"/>
-              </a:spcAft>
-              <a:buSzPct val="100000"/>
-              <a:buChar char="•"/>
-              <a:lnSpc>
-                <a:spcPts val="2200"/>
-              </a:lnSpc>
-            </a:pPr>
-            <a:r>
-              <a:rPr sz="2000" b="0">
-                <a:solidFill>
-                  <a:srgbClr val="333333"/>
-                </a:solidFill>
-                <a:latin typeface="Calibri"/>
-              </a:rPr>
-              <a:t>Le nombre sur une arête est son poids : combien de fils relient la paire</a:t>
-            </a:r>
-          </a:p>
-          <a:p>
-            <a:pPr lvl="0" marL="457200" indent="-228600">
-              <a:buFont typeface="Calibri"/>
-              <a:spcAft>
-                <a:spcPts val="1000"/>
-              </a:spcAft>
-              <a:buSzPct val="100000"/>
-              <a:buChar char="•"/>
-              <a:lnSpc>
-                <a:spcPts val="2200"/>
-              </a:lnSpc>
-            </a:pPr>
-            <a:r>
-              <a:rPr sz="2000" b="0">
-                <a:solidFill>
-                  <a:srgbClr val="333333"/>
-                </a:solidFill>
-                <a:latin typeface="Calibri"/>
-              </a:rPr>
-              <a:t>Notre exemple a cinq cellules, de A à E</a:t>
-            </a:r>
-          </a:p>
-          <a:p>
-            <a:pPr lvl="0" marL="457200" indent="-228600">
-              <a:buFont typeface="Calibri"/>
-              <a:spcAft>
-                <a:spcPts val="1000"/>
-              </a:spcAft>
-              <a:buSzPct val="100000"/>
-              <a:buChar char="•"/>
-              <a:lnSpc>
-                <a:spcPts val="2200"/>
-              </a:lnSpc>
-            </a:pPr>
-            <a:r>
-              <a:rPr sz="2000" b="0">
-                <a:solidFill>
-                  <a:srgbClr val="333333"/>
-                </a:solidFill>
-                <a:latin typeface="Calibri"/>
-              </a:rPr>
-              <a:t>Les arêtes les plus lourdes, A–B et D–E, ont cinq fils chacune</a:t>
+              <a:t>Certaines paires partagent beaucoup de fils, d'autres un seul</a:t>
             </a:r>
           </a:p>
         </p:txBody>
       </p:sp>
       <p:pic>
         <p:nvPicPr>
-          <p:cNvPr id="4" name="Picture 3" descr="chip-to-graph.png"/>
+          <p:cNvPr id="4" name="Picture 3" descr="chip-to-graph-1.png"/>
           <p:cNvPicPr>
             <a:picLocks noChangeAspect="1"/>
           </p:cNvPicPr>
@@ -7681,7 +7802,7 @@
                 </a:solidFill>
                 <a:latin typeface="Calibri"/>
               </a:rPr>
-              <a:t>Pièges à éviter</a:t>
+              <a:t>Piège 1 : pas de limite de taille</a:t>
             </a:r>
           </a:p>
         </p:txBody>
@@ -7695,7 +7816,7 @@
         <p:spPr>
           <a:xfrm>
             <a:off x="548640" y="1234440"/>
-            <a:ext cx="11064240" cy="4937760"/>
+            <a:ext cx="5303520" cy="4754880"/>
           </a:xfrm>
           <a:prstGeom prst="rect">
             <a:avLst/>
@@ -7726,7 +7847,7 @@
                 </a:solidFill>
                 <a:latin typeface="Calibri"/>
               </a:rPr>
-              <a:t>Attention à quatre erreurs courantes</a:t>
+              <a:t>Trois pièges peuvent tromper une méthode qui a l'air raisonnable</a:t>
             </a:r>
           </a:p>
           <a:p>
@@ -7748,7 +7869,7 @@
                 </a:solidFill>
                 <a:latin typeface="Calibri"/>
               </a:rPr>
-              <a:t>Donner la taille de coupe sans l'équilibre</a:t>
+              <a:t>Et oui, une coupe plus petite peut être le mauvais choix</a:t>
             </a:r>
           </a:p>
           <a:p>
@@ -7770,7 +7891,7 @@
                 </a:solidFill>
                 <a:latin typeface="Calibri"/>
               </a:rPr>
-              <a:t>Laisser un côté dépasser sa limite, ce qui embellit la coupe</a:t>
+              <a:t>Voici une étoile : A au milieu, relié à cinq autres cellules</a:t>
             </a:r>
           </a:p>
           <a:p>
@@ -7792,7 +7913,7 @@
                 </a:solidFill>
                 <a:latin typeface="Calibri"/>
               </a:rPr>
-              <a:t>Se fier à une seule graine : ici, la coupe va de trois à seize</a:t>
+              <a:t>Un ancien glouton sans limite de taille ajoutait toujours des cellules près de A</a:t>
             </a:r>
           </a:p>
           <a:p>
@@ -7814,14 +7935,38 @@
                 </a:solidFill>
                 <a:latin typeface="Calibri"/>
               </a:rPr>
-              <a:t>Et départager selon l'ordre de l'entrée : la réponse change avec le fichier</a:t>
-            </a:r>
-          </a:p>
-        </p:txBody>
-      </p:sp>
-      <p:sp>
-        <p:nvSpPr>
-          <p:cNvPr id="4" name="TextBox 3"/>
+              <a:t>Il finissait avec cinq cellules contre une, et une coupe de cinq</a:t>
+            </a:r>
+          </a:p>
+        </p:txBody>
+      </p:sp>
+      <p:pic>
+        <p:nvPicPr>
+          <p:cNvPr id="4" name="Picture 3" descr="star-cap-1.png"/>
+          <p:cNvPicPr>
+            <a:picLocks noChangeAspect="1"/>
+          </p:cNvPicPr>
+          <p:nvPr/>
+        </p:nvPicPr>
+        <p:blipFill>
+          <a:blip r:embed="rId2"/>
+          <a:stretch>
+            <a:fillRect/>
+          </a:stretch>
+        </p:blipFill>
+        <p:spPr>
+          <a:xfrm>
+            <a:off x="6172200" y="1234440"/>
+            <a:ext cx="3733215" cy="4754879"/>
+          </a:xfrm>
+          <a:prstGeom prst="rect">
+            <a:avLst/>
+          </a:prstGeom>
+        </p:spPr>
+      </p:pic>
+      <p:sp>
+        <p:nvSpPr>
+          <p:cNvPr id="5" name="TextBox 4"/>
           <p:cNvSpPr txBox="1"/>
           <p:nvPr/>
         </p:nvSpPr>
@@ -7910,7 +8055,7 @@
                 </a:solidFill>
                 <a:latin typeface="Calibri"/>
               </a:rPr>
-              <a:t>Bilan : trois façons de démarrer</a:t>
+              <a:t>Piège 1 : la limite de taille règle le problème</a:t>
             </a:r>
           </a:p>
         </p:txBody>
@@ -7924,7 +8069,7 @@
         <p:spPr>
           <a:xfrm>
             <a:off x="548640" y="1234440"/>
-            <a:ext cx="11064240" cy="4937760"/>
+            <a:ext cx="5303520" cy="4754880"/>
           </a:xfrm>
           <a:prstGeom prst="rect">
             <a:avLst/>
@@ -7955,7 +8100,7 @@
                 </a:solidFill>
                 <a:latin typeface="Calibri"/>
               </a:rPr>
-              <a:t>Des méthodes comme KL et FM ont besoin d'une première partition valide</a:t>
+              <a:t>Avec six cellules, il en faut trois par côté, donc cette partition n'est pas valide</a:t>
             </a:r>
           </a:p>
           <a:p>
@@ -7977,7 +8122,7 @@
                 </a:solidFill>
                 <a:latin typeface="Calibri"/>
               </a:rPr>
-              <a:t>L'aléatoire mélange et distribue : c'est rapide, mais cela dépend de la chance</a:t>
+              <a:t>Notre glouton arrête chaque côté à trois cellules, et obtient quinze</a:t>
             </a:r>
           </a:p>
           <a:p>
@@ -7999,80 +8144,38 @@
                 </a:solidFill>
                 <a:latin typeface="Calibri"/>
               </a:rPr>
-              <a:t>Le glouton garde l'arête la plus lourde dedans, puis coupe le moins possible</a:t>
-            </a:r>
-          </a:p>
-          <a:p>
-            <a:pPr lvl="0" marL="457200" indent="-228600">
-              <a:buFont typeface="Calibri"/>
-              <a:spcAft>
-                <a:spcPts val="1000"/>
-              </a:spcAft>
-              <a:buSzPct val="100000"/>
-              <a:buChar char="•"/>
-              <a:lnSpc>
-                <a:spcPts val="2200"/>
-              </a:lnSpc>
-            </a:pPr>
-            <a:r>
-              <a:rPr sz="2000" b="0">
-                <a:solidFill>
-                  <a:srgbClr val="333333"/>
-                </a:solidFill>
-                <a:latin typeface="Calibri"/>
-              </a:rPr>
-              <a:t>La croissance s'étend depuis un nœud de départ, donc le nœud de départ compte</a:t>
-            </a:r>
-          </a:p>
-          <a:p>
-            <a:pPr lvl="0" marL="457200" indent="-228600">
-              <a:buFont typeface="Calibri"/>
-              <a:spcAft>
-                <a:spcPts val="1000"/>
-              </a:spcAft>
-              <a:buSzPct val="100000"/>
-              <a:buChar char="•"/>
-              <a:lnSpc>
-                <a:spcPts val="2200"/>
-              </a:lnSpc>
-            </a:pPr>
-            <a:r>
-              <a:rPr sz="2000" b="0">
-                <a:solidFill>
-                  <a:srgbClr val="333333"/>
-                </a:solidFill>
-                <a:latin typeface="Calibri"/>
-              </a:rPr>
-              <a:t>Les égalités et les limites de taille peuvent changer la réponse</a:t>
-            </a:r>
-          </a:p>
-          <a:p>
-            <a:pPr lvl="0" marL="457200" indent="-228600">
-              <a:buFont typeface="Calibri"/>
-              <a:spcAft>
-                <a:spcPts val="1000"/>
-              </a:spcAft>
-              <a:buSzPct val="100000"/>
-              <a:buChar char="•"/>
-              <a:lnSpc>
-                <a:spcPts val="2200"/>
-              </a:lnSpc>
-            </a:pPr>
-            <a:r>
-              <a:rPr sz="2000" b="0">
-                <a:solidFill>
-                  <a:srgbClr val="333333"/>
-                </a:solidFill>
-                <a:latin typeface="Calibri"/>
-              </a:rPr>
-              <a:t>Construisez plusieurs départs, gardez les valides, choisissez la plus petite coupe</a:t>
-            </a:r>
-          </a:p>
-        </p:txBody>
-      </p:sp>
-      <p:sp>
-        <p:nvSpPr>
-          <p:cNvPr id="4" name="TextBox 3"/>
+              <a:t>Aucune partition valide de cette étoile ne fait mieux</a:t>
+            </a:r>
+          </a:p>
+        </p:txBody>
+      </p:sp>
+      <p:pic>
+        <p:nvPicPr>
+          <p:cNvPr id="4" name="Picture 3" descr="star-cap.png"/>
+          <p:cNvPicPr>
+            <a:picLocks noChangeAspect="1"/>
+          </p:cNvPicPr>
+          <p:nvPr/>
+        </p:nvPicPr>
+        <p:blipFill>
+          <a:blip r:embed="rId2"/>
+          <a:stretch>
+            <a:fillRect/>
+          </a:stretch>
+        </p:blipFill>
+        <p:spPr>
+          <a:xfrm>
+            <a:off x="6172200" y="1234440"/>
+            <a:ext cx="3733215" cy="4754879"/>
+          </a:xfrm>
+          <a:prstGeom prst="rect">
+            <a:avLst/>
+          </a:prstGeom>
+        </p:spPr>
+      </p:pic>
+      <p:sp>
+        <p:nvSpPr>
+          <p:cNvPr id="5" name="TextBox 4"/>
           <p:cNvSpPr txBox="1"/>
           <p:nvPr/>
         </p:nvSpPr>
@@ -8161,7 +8264,7 @@
                 </a:solidFill>
                 <a:latin typeface="Calibri"/>
               </a:rPr>
-              <a:t>À vous de jouer</a:t>
+              <a:t>Piège 2 : une égalité peut décider du résultat</a:t>
             </a:r>
           </a:p>
         </p:txBody>
@@ -8175,7 +8278,7 @@
         <p:spPr>
           <a:xfrm>
             <a:off x="548640" y="1234440"/>
-            <a:ext cx="11064240" cy="4937760"/>
+            <a:ext cx="5303520" cy="4754880"/>
           </a:xfrm>
           <a:prstGeom prst="rect">
             <a:avLst/>
@@ -8206,7 +8309,7 @@
                 </a:solidFill>
                 <a:latin typeface="Calibri"/>
               </a:rPr>
-              <a:t>C'est maintenant à vous</a:t>
+              <a:t>Dans ce graphe, A–B et D–E pèsent cinq toutes les deux</a:t>
             </a:r>
           </a:p>
           <a:p>
@@ -8228,7 +8331,7 @@
                 </a:solidFill>
                 <a:latin typeface="Calibri"/>
               </a:rPr>
-              <a:t>Choisissez un parcours : le lab dans le navigateur, le parcours Python, ou les deux</a:t>
+              <a:t>Le glouton doit en choisir une pour démarrer</a:t>
             </a:r>
           </a:p>
           <a:p>
@@ -8250,9 +8353,152 @@
                 </a:solidFill>
                 <a:latin typeface="Calibri"/>
               </a:rPr>
-              <a:t>Cochez chaque case de la liste de contrôle au fur et à mesure</a:t>
-            </a:r>
-          </a:p>
+              <a:t>La règle prend le plus petit nom, A–B, et cela donne une coupe de neuf</a:t>
+            </a:r>
+          </a:p>
+        </p:txBody>
+      </p:sp>
+      <p:pic>
+        <p:nvPicPr>
+          <p:cNvPr id="4" name="Picture 3" descr="tie-graph-1.png"/>
+          <p:cNvPicPr>
+            <a:picLocks noChangeAspect="1"/>
+          </p:cNvPicPr>
+          <p:nvPr/>
+        </p:nvPicPr>
+        <p:blipFill>
+          <a:blip r:embed="rId2"/>
+          <a:stretch>
+            <a:fillRect/>
+          </a:stretch>
+        </p:blipFill>
+        <p:spPr>
+          <a:xfrm>
+            <a:off x="6172200" y="1234440"/>
+            <a:ext cx="4007853" cy="4754879"/>
+          </a:xfrm>
+          <a:prstGeom prst="rect">
+            <a:avLst/>
+          </a:prstGeom>
+        </p:spPr>
+      </p:pic>
+      <p:sp>
+        <p:nvSpPr>
+          <p:cNvPr id="5" name="TextBox 4"/>
+          <p:cNvSpPr txBox="1"/>
+          <p:nvPr/>
+        </p:nvSpPr>
+        <p:spPr>
+          <a:xfrm>
+            <a:off x="548640" y="6355080"/>
+            <a:ext cx="11064240" cy="320040"/>
+          </a:xfrm>
+          <a:prstGeom prst="rect">
+            <a:avLst/>
+          </a:prstGeom>
+          <a:noFill/>
+        </p:spPr>
+        <p:txBody>
+          <a:bodyPr wrap="square">
+            <a:noAutofit/>
+          </a:bodyPr>
+          <a:lstStyle/>
+          <a:p>
+            <a:pPr algn="r">
+              <a:lnSpc>
+                <a:spcPts val="2200"/>
+              </a:lnSpc>
+              <a:defRPr sz="1000" b="0">
+                <a:solidFill>
+                  <a:srgbClr val="666666"/>
+                </a:solidFill>
+                <a:latin typeface="Calibri"/>
+              </a:defRPr>
+            </a:pPr>
+            <a:r>
+              <a:t>learn_partitioning — 03 bipartition initiale</a:t>
+            </a:r>
+          </a:p>
+        </p:txBody>
+      </p:sp>
+    </p:spTree>
+  </p:cSld>
+  <p:clrMapOvr>
+    <a:masterClrMapping/>
+  </p:clrMapOvr>
+</p:sld>
+</file>
+
+<file path=ppt/slides/slide23.xml><?xml version="1.0" encoding="utf-8"?>
+<p:sld xmlns:a="http://schemas.openxmlformats.org/drawingml/2006/main" xmlns:p="http://schemas.openxmlformats.org/presentationml/2006/main" xmlns:r="http://schemas.openxmlformats.org/officeDocument/2006/relationships">
+  <p:cSld>
+    <p:spTree>
+      <p:nvGrpSpPr>
+        <p:cNvPr id="1" name=""/>
+        <p:cNvGrpSpPr/>
+        <p:nvPr/>
+      </p:nvGrpSpPr>
+      <p:grpSpPr/>
+      <p:sp>
+        <p:nvSpPr>
+          <p:cNvPr id="2" name="TextBox 1"/>
+          <p:cNvSpPr txBox="1"/>
+          <p:nvPr/>
+        </p:nvSpPr>
+        <p:spPr>
+          <a:xfrm>
+            <a:off x="548640" y="411480"/>
+            <a:ext cx="11064240" cy="777240"/>
+          </a:xfrm>
+          <a:prstGeom prst="rect">
+            <a:avLst/>
+          </a:prstGeom>
+          <a:noFill/>
+        </p:spPr>
+        <p:txBody>
+          <a:bodyPr wrap="square">
+            <a:noAutofit/>
+          </a:bodyPr>
+          <a:lstStyle/>
+          <a:p>
+            <a:pPr>
+              <a:lnSpc>
+                <a:spcPts val="2200"/>
+              </a:lnSpc>
+            </a:pPr>
+            <a:r>
+              <a:rPr sz="2800" b="1">
+                <a:solidFill>
+                  <a:srgbClr val="1A1A2E"/>
+                </a:solidFill>
+                <a:latin typeface="Calibri"/>
+              </a:rPr>
+              <a:t>Piège 2 : l'autre ancre</a:t>
+            </a:r>
+          </a:p>
+        </p:txBody>
+      </p:sp>
+      <p:sp>
+        <p:nvSpPr>
+          <p:cNvPr id="3" name="TextBox 2"/>
+          <p:cNvSpPr txBox="1"/>
+          <p:nvPr/>
+        </p:nvSpPr>
+        <p:spPr>
+          <a:xfrm>
+            <a:off x="548640" y="1234440"/>
+            <a:ext cx="5303520" cy="4754880"/>
+          </a:xfrm>
+          <a:prstGeom prst="rect">
+            <a:avLst/>
+          </a:prstGeom>
+          <a:noFill/>
+        </p:spPr>
+        <p:txBody>
+          <a:bodyPr wrap="square">
+            <a:noAutofit/>
+          </a:bodyPr>
+          <a:lstStyle/>
           <a:p>
             <a:pPr lvl="0" marL="457200" indent="-228600">
               <a:buFont typeface="Calibri"/>
@@ -8272,7 +8518,7 @@
                 </a:solidFill>
                 <a:latin typeface="Calibri"/>
               </a:rPr>
-              <a:t>Puis faites le court quiz pour vérifier les idées principales</a:t>
+              <a:t>Démarrer de D–E donne une coupe de quatre</a:t>
             </a:r>
           </a:p>
           <a:p>
@@ -8294,7 +8540,1256 @@
                 </a:solidFill>
                 <a:latin typeface="Calibri"/>
               </a:rPr>
-              <a:t>La suite, c'est Kernighan–Lin, qui part de votre partition et l'améliore</a:t>
+              <a:t>Une simple règle de départage a donc plus que doublé la coupe</a:t>
+            </a:r>
+          </a:p>
+          <a:p>
+            <a:pPr lvl="0" marL="457200" indent="-228600">
+              <a:buFont typeface="Calibri"/>
+              <a:spcAft>
+                <a:spcPts val="1000"/>
+              </a:spcAft>
+              <a:buSzPct val="100000"/>
+              <a:buChar char="•"/>
+              <a:lnSpc>
+                <a:spcPts val="2200"/>
+              </a:lnSpc>
+            </a:pPr>
+            <a:r>
+              <a:rPr sz="2000" b="0">
+                <a:solidFill>
+                  <a:srgbClr val="333333"/>
+                </a:solidFill>
+                <a:latin typeface="Calibri"/>
+              </a:rPr>
+              <a:t>La croissance depuis C trouve aussi quatre</a:t>
+            </a:r>
+          </a:p>
+        </p:txBody>
+      </p:sp>
+      <p:pic>
+        <p:nvPicPr>
+          <p:cNvPr id="4" name="Picture 3" descr="tie-graph.png"/>
+          <p:cNvPicPr>
+            <a:picLocks noChangeAspect="1"/>
+          </p:cNvPicPr>
+          <p:nvPr/>
+        </p:nvPicPr>
+        <p:blipFill>
+          <a:blip r:embed="rId2"/>
+          <a:stretch>
+            <a:fillRect/>
+          </a:stretch>
+        </p:blipFill>
+        <p:spPr>
+          <a:xfrm>
+            <a:off x="6172200" y="1234440"/>
+            <a:ext cx="4007853" cy="4754879"/>
+          </a:xfrm>
+          <a:prstGeom prst="rect">
+            <a:avLst/>
+          </a:prstGeom>
+        </p:spPr>
+      </p:pic>
+      <p:sp>
+        <p:nvSpPr>
+          <p:cNvPr id="5" name="TextBox 4"/>
+          <p:cNvSpPr txBox="1"/>
+          <p:nvPr/>
+        </p:nvSpPr>
+        <p:spPr>
+          <a:xfrm>
+            <a:off x="548640" y="6355080"/>
+            <a:ext cx="11064240" cy="320040"/>
+          </a:xfrm>
+          <a:prstGeom prst="rect">
+            <a:avLst/>
+          </a:prstGeom>
+          <a:noFill/>
+        </p:spPr>
+        <p:txBody>
+          <a:bodyPr wrap="square">
+            <a:noAutofit/>
+          </a:bodyPr>
+          <a:lstStyle/>
+          <a:p>
+            <a:pPr algn="r">
+              <a:lnSpc>
+                <a:spcPts val="2200"/>
+              </a:lnSpc>
+              <a:defRPr sz="1000" b="0">
+                <a:solidFill>
+                  <a:srgbClr val="666666"/>
+                </a:solidFill>
+                <a:latin typeface="Calibri"/>
+              </a:defRPr>
+            </a:pPr>
+            <a:r>
+              <a:t>learn_partitioning — 03 bipartition initiale</a:t>
+            </a:r>
+          </a:p>
+        </p:txBody>
+      </p:sp>
+    </p:spTree>
+  </p:cSld>
+  <p:clrMapOvr>
+    <a:masterClrMapping/>
+  </p:clrMapOvr>
+</p:sld>
+</file>
+
+<file path=ppt/slides/slide24.xml><?xml version="1.0" encoding="utf-8"?>
+<p:sld xmlns:a="http://schemas.openxmlformats.org/drawingml/2006/main" xmlns:p="http://schemas.openxmlformats.org/presentationml/2006/main" xmlns:r="http://schemas.openxmlformats.org/officeDocument/2006/relationships">
+  <p:cSld>
+    <p:spTree>
+      <p:nvGrpSpPr>
+        <p:cNvPr id="1" name=""/>
+        <p:cNvGrpSpPr/>
+        <p:nvPr/>
+      </p:nvGrpSpPr>
+      <p:grpSpPr/>
+      <p:sp>
+        <p:nvSpPr>
+          <p:cNvPr id="2" name="TextBox 1"/>
+          <p:cNvSpPr txBox="1"/>
+          <p:nvPr/>
+        </p:nvSpPr>
+        <p:spPr>
+          <a:xfrm>
+            <a:off x="548640" y="411480"/>
+            <a:ext cx="11064240" cy="777240"/>
+          </a:xfrm>
+          <a:prstGeom prst="rect">
+            <a:avLst/>
+          </a:prstGeom>
+          <a:noFill/>
+        </p:spPr>
+        <p:txBody>
+          <a:bodyPr wrap="square">
+            <a:noAutofit/>
+          </a:bodyPr>
+          <a:lstStyle/>
+          <a:p>
+            <a:pPr>
+              <a:lnSpc>
+                <a:spcPts val="2200"/>
+              </a:lnSpc>
+            </a:pPr>
+            <a:r>
+              <a:rPr sz="2800" b="1">
+                <a:solidFill>
+                  <a:srgbClr val="1A1A2E"/>
+                </a:solidFill>
+                <a:latin typeface="Calibri"/>
+              </a:rPr>
+              <a:t>Piège 3 : le fil le plus lourd n'est pas toujours à l'intérieur</a:t>
+            </a:r>
+          </a:p>
+        </p:txBody>
+      </p:sp>
+      <p:sp>
+        <p:nvSpPr>
+          <p:cNvPr id="3" name="TextBox 2"/>
+          <p:cNvSpPr txBox="1"/>
+          <p:nvPr/>
+        </p:nvSpPr>
+        <p:spPr>
+          <a:xfrm>
+            <a:off x="548640" y="1234440"/>
+            <a:ext cx="5303520" cy="4754880"/>
+          </a:xfrm>
+          <a:prstGeom prst="rect">
+            <a:avLst/>
+          </a:prstGeom>
+          <a:noFill/>
+        </p:spPr>
+        <p:txBody>
+          <a:bodyPr wrap="square">
+            <a:noAutofit/>
+          </a:bodyPr>
+          <a:lstStyle/>
+          <a:p>
+            <a:pPr lvl="0" marL="457200" indent="-228600">
+              <a:buFont typeface="Calibri"/>
+              <a:spcAft>
+                <a:spcPts val="1000"/>
+              </a:spcAft>
+              <a:buSzPct val="100000"/>
+              <a:buChar char="•"/>
+              <a:lnSpc>
+                <a:spcPts val="2200"/>
+              </a:lnSpc>
+            </a:pPr>
+            <a:r>
+              <a:rPr sz="2000" b="0">
+                <a:solidFill>
+                  <a:srgbClr val="333333"/>
+                </a:solidFill>
+                <a:latin typeface="Calibri"/>
+              </a:rPr>
+              <a:t>Voici deux triangles, reliés par un seul pont, C–D, de poids quatre</a:t>
+            </a:r>
+          </a:p>
+          <a:p>
+            <a:pPr lvl="0" marL="457200" indent="-228600">
+              <a:buFont typeface="Calibri"/>
+              <a:spcAft>
+                <a:spcPts val="1000"/>
+              </a:spcAft>
+              <a:buSzPct val="100000"/>
+              <a:buChar char="•"/>
+              <a:lnSpc>
+                <a:spcPts val="2200"/>
+              </a:lnSpc>
+            </a:pPr>
+            <a:r>
+              <a:rPr sz="2000" b="0">
+                <a:solidFill>
+                  <a:srgbClr val="333333"/>
+                </a:solidFill>
+                <a:latin typeface="Calibri"/>
+              </a:rPr>
+              <a:t>Chaque arête de triangle pèse trois</a:t>
+            </a:r>
+          </a:p>
+          <a:p>
+            <a:pPr lvl="0" marL="457200" indent="-228600">
+              <a:buFont typeface="Calibri"/>
+              <a:spcAft>
+                <a:spcPts val="1000"/>
+              </a:spcAft>
+              <a:buSzPct val="100000"/>
+              <a:buChar char="•"/>
+              <a:lnSpc>
+                <a:spcPts val="2200"/>
+              </a:lnSpc>
+            </a:pPr>
+            <a:r>
+              <a:rPr sz="2000" b="0">
+                <a:solidFill>
+                  <a:srgbClr val="333333"/>
+                </a:solidFill>
+                <a:latin typeface="Calibri"/>
+              </a:rPr>
+              <a:t>Le glouton démarre de l'arête la plus lourde, qui est ici le pont lui-même</a:t>
+            </a:r>
+          </a:p>
+          <a:p>
+            <a:pPr lvl="0" marL="457200" indent="-228600">
+              <a:buFont typeface="Calibri"/>
+              <a:spcAft>
+                <a:spcPts val="1000"/>
+              </a:spcAft>
+              <a:buSzPct val="100000"/>
+              <a:buChar char="•"/>
+              <a:lnSpc>
+                <a:spcPts val="2200"/>
+              </a:lnSpc>
+            </a:pPr>
+            <a:r>
+              <a:rPr sz="2000" b="0">
+                <a:solidFill>
+                  <a:srgbClr val="333333"/>
+                </a:solidFill>
+                <a:latin typeface="Calibri"/>
+              </a:rPr>
+              <a:t>C et D commencent donc du même côté, et la coupe finit à douze</a:t>
+            </a:r>
+          </a:p>
+        </p:txBody>
+      </p:sp>
+      <p:pic>
+        <p:nvPicPr>
+          <p:cNvPr id="4" name="Picture 3" descr="bridge-graph-1.png"/>
+          <p:cNvPicPr>
+            <a:picLocks noChangeAspect="1"/>
+          </p:cNvPicPr>
+          <p:nvPr/>
+        </p:nvPicPr>
+        <p:blipFill>
+          <a:blip r:embed="rId2"/>
+          <a:stretch>
+            <a:fillRect/>
+          </a:stretch>
+        </p:blipFill>
+        <p:spPr>
+          <a:xfrm>
+            <a:off x="6172200" y="1234440"/>
+            <a:ext cx="4007853" cy="4754879"/>
+          </a:xfrm>
+          <a:prstGeom prst="rect">
+            <a:avLst/>
+          </a:prstGeom>
+        </p:spPr>
+      </p:pic>
+      <p:sp>
+        <p:nvSpPr>
+          <p:cNvPr id="5" name="TextBox 4"/>
+          <p:cNvSpPr txBox="1"/>
+          <p:nvPr/>
+        </p:nvSpPr>
+        <p:spPr>
+          <a:xfrm>
+            <a:off x="548640" y="6355080"/>
+            <a:ext cx="11064240" cy="320040"/>
+          </a:xfrm>
+          <a:prstGeom prst="rect">
+            <a:avLst/>
+          </a:prstGeom>
+          <a:noFill/>
+        </p:spPr>
+        <p:txBody>
+          <a:bodyPr wrap="square">
+            <a:noAutofit/>
+          </a:bodyPr>
+          <a:lstStyle/>
+          <a:p>
+            <a:pPr algn="r">
+              <a:lnSpc>
+                <a:spcPts val="2200"/>
+              </a:lnSpc>
+              <a:defRPr sz="1000" b="0">
+                <a:solidFill>
+                  <a:srgbClr val="666666"/>
+                </a:solidFill>
+                <a:latin typeface="Calibri"/>
+              </a:defRPr>
+            </a:pPr>
+            <a:r>
+              <a:t>learn_partitioning — 03 bipartition initiale</a:t>
+            </a:r>
+          </a:p>
+        </p:txBody>
+      </p:sp>
+    </p:spTree>
+  </p:cSld>
+  <p:clrMapOvr>
+    <a:masterClrMapping/>
+  </p:clrMapOvr>
+</p:sld>
+</file>
+
+<file path=ppt/slides/slide25.xml><?xml version="1.0" encoding="utf-8"?>
+<p:sld xmlns:a="http://schemas.openxmlformats.org/drawingml/2006/main" xmlns:p="http://schemas.openxmlformats.org/presentationml/2006/main" xmlns:r="http://schemas.openxmlformats.org/officeDocument/2006/relationships">
+  <p:cSld>
+    <p:spTree>
+      <p:nvGrpSpPr>
+        <p:cNvPr id="1" name=""/>
+        <p:cNvGrpSpPr/>
+        <p:nvPr/>
+      </p:nvGrpSpPr>
+      <p:grpSpPr/>
+      <p:sp>
+        <p:nvSpPr>
+          <p:cNvPr id="2" name="TextBox 1"/>
+          <p:cNvSpPr txBox="1"/>
+          <p:nvPr/>
+        </p:nvSpPr>
+        <p:spPr>
+          <a:xfrm>
+            <a:off x="548640" y="411480"/>
+            <a:ext cx="11064240" cy="777240"/>
+          </a:xfrm>
+          <a:prstGeom prst="rect">
+            <a:avLst/>
+          </a:prstGeom>
+          <a:noFill/>
+        </p:spPr>
+        <p:txBody>
+          <a:bodyPr wrap="square">
+            <a:noAutofit/>
+          </a:bodyPr>
+          <a:lstStyle/>
+          <a:p>
+            <a:pPr>
+              <a:lnSpc>
+                <a:spcPts val="2200"/>
+              </a:lnSpc>
+            </a:pPr>
+            <a:r>
+              <a:rPr sz="2800" b="1">
+                <a:solidFill>
+                  <a:srgbClr val="1A1A2E"/>
+                </a:solidFill>
+                <a:latin typeface="Calibri"/>
+              </a:rPr>
+              <a:t>Piège 3 : la croissance garde les triangles</a:t>
+            </a:r>
+          </a:p>
+        </p:txBody>
+      </p:sp>
+      <p:sp>
+        <p:nvSpPr>
+          <p:cNvPr id="3" name="TextBox 2"/>
+          <p:cNvSpPr txBox="1"/>
+          <p:nvPr/>
+        </p:nvSpPr>
+        <p:spPr>
+          <a:xfrm>
+            <a:off x="548640" y="1234440"/>
+            <a:ext cx="5303520" cy="4754880"/>
+          </a:xfrm>
+          <a:prstGeom prst="rect">
+            <a:avLst/>
+          </a:prstGeom>
+          <a:noFill/>
+        </p:spPr>
+        <p:txBody>
+          <a:bodyPr wrap="square">
+            <a:noAutofit/>
+          </a:bodyPr>
+          <a:lstStyle/>
+          <a:p>
+            <a:pPr lvl="0" marL="457200" indent="-228600">
+              <a:buFont typeface="Calibri"/>
+              <a:spcAft>
+                <a:spcPts val="1000"/>
+              </a:spcAft>
+              <a:buSzPct val="100000"/>
+              <a:buChar char="•"/>
+              <a:lnSpc>
+                <a:spcPts val="2200"/>
+              </a:lnSpc>
+            </a:pPr>
+            <a:r>
+              <a:rPr sz="2000" b="0">
+                <a:solidFill>
+                  <a:srgbClr val="333333"/>
+                </a:solidFill>
+                <a:latin typeface="Calibri"/>
+              </a:rPr>
+              <a:t>La croissance depuis A garde son triangle ensemble, et ne coupe que le pont : quatre</a:t>
+            </a:r>
+          </a:p>
+          <a:p>
+            <a:pPr lvl="0" marL="457200" indent="-228600">
+              <a:buFont typeface="Calibri"/>
+              <a:spcAft>
+                <a:spcPts val="1000"/>
+              </a:spcAft>
+              <a:buSzPct val="100000"/>
+              <a:buChar char="•"/>
+              <a:lnSpc>
+                <a:spcPts val="2200"/>
+              </a:lnSpc>
+            </a:pPr>
+            <a:r>
+              <a:rPr sz="2000" b="0">
+                <a:solidFill>
+                  <a:srgbClr val="333333"/>
+                </a:solidFill>
+                <a:latin typeface="Calibri"/>
+              </a:rPr>
+              <a:t>Faites une pause et devinez : la croissance est-elle toujours meilleure que le glouton ?</a:t>
+            </a:r>
+          </a:p>
+        </p:txBody>
+      </p:sp>
+      <p:pic>
+        <p:nvPicPr>
+          <p:cNvPr id="4" name="Picture 3" descr="bridge-graph.png"/>
+          <p:cNvPicPr>
+            <a:picLocks noChangeAspect="1"/>
+          </p:cNvPicPr>
+          <p:nvPr/>
+        </p:nvPicPr>
+        <p:blipFill>
+          <a:blip r:embed="rId2"/>
+          <a:stretch>
+            <a:fillRect/>
+          </a:stretch>
+        </p:blipFill>
+        <p:spPr>
+          <a:xfrm>
+            <a:off x="6172200" y="1234440"/>
+            <a:ext cx="4007853" cy="4754879"/>
+          </a:xfrm>
+          <a:prstGeom prst="rect">
+            <a:avLst/>
+          </a:prstGeom>
+        </p:spPr>
+      </p:pic>
+      <p:sp>
+        <p:nvSpPr>
+          <p:cNvPr id="5" name="TextBox 4"/>
+          <p:cNvSpPr txBox="1"/>
+          <p:nvPr/>
+        </p:nvSpPr>
+        <p:spPr>
+          <a:xfrm>
+            <a:off x="548640" y="6355080"/>
+            <a:ext cx="11064240" cy="320040"/>
+          </a:xfrm>
+          <a:prstGeom prst="rect">
+            <a:avLst/>
+          </a:prstGeom>
+          <a:noFill/>
+        </p:spPr>
+        <p:txBody>
+          <a:bodyPr wrap="square">
+            <a:noAutofit/>
+          </a:bodyPr>
+          <a:lstStyle/>
+          <a:p>
+            <a:pPr algn="r">
+              <a:lnSpc>
+                <a:spcPts val="2200"/>
+              </a:lnSpc>
+              <a:defRPr sz="1000" b="0">
+                <a:solidFill>
+                  <a:srgbClr val="666666"/>
+                </a:solidFill>
+                <a:latin typeface="Calibri"/>
+              </a:defRPr>
+            </a:pPr>
+            <a:r>
+              <a:t>learn_partitioning — 03 bipartition initiale</a:t>
+            </a:r>
+          </a:p>
+        </p:txBody>
+      </p:sp>
+    </p:spTree>
+  </p:cSld>
+  <p:clrMapOvr>
+    <a:masterClrMapping/>
+  </p:clrMapOvr>
+</p:sld>
+</file>
+
+<file path=ppt/slides/slide26.xml><?xml version="1.0" encoding="utf-8"?>
+<p:sld xmlns:a="http://schemas.openxmlformats.org/drawingml/2006/main" xmlns:p="http://schemas.openxmlformats.org/presentationml/2006/main" xmlns:r="http://schemas.openxmlformats.org/officeDocument/2006/relationships">
+  <p:cSld>
+    <p:spTree>
+      <p:nvGrpSpPr>
+        <p:cNvPr id="1" name=""/>
+        <p:cNvGrpSpPr/>
+        <p:nvPr/>
+      </p:nvGrpSpPr>
+      <p:grpSpPr/>
+      <p:sp>
+        <p:nvSpPr>
+          <p:cNvPr id="2" name="TextBox 1"/>
+          <p:cNvSpPr txBox="1"/>
+          <p:nvPr/>
+        </p:nvSpPr>
+        <p:spPr>
+          <a:xfrm>
+            <a:off x="548640" y="411480"/>
+            <a:ext cx="11064240" cy="777240"/>
+          </a:xfrm>
+          <a:prstGeom prst="rect">
+            <a:avLst/>
+          </a:prstGeom>
+          <a:noFill/>
+        </p:spPr>
+        <p:txBody>
+          <a:bodyPr wrap="square">
+            <a:noAutofit/>
+          </a:bodyPr>
+          <a:lstStyle/>
+          <a:p>
+            <a:pPr>
+              <a:lnSpc>
+                <a:spcPts val="2200"/>
+              </a:lnSpc>
+            </a:pPr>
+            <a:r>
+              <a:rPr sz="2800" b="1">
+                <a:solidFill>
+                  <a:srgbClr val="1A1A2E"/>
+                </a:solidFill>
+                <a:latin typeface="Calibri"/>
+              </a:rPr>
+              <a:t>Parcours lab dans le navigateur</a:t>
+            </a:r>
+          </a:p>
+        </p:txBody>
+      </p:sp>
+      <p:pic>
+        <p:nvPicPr>
+          <p:cNvPr id="3" name="Picture 2" descr="lab-starter.png"/>
+          <p:cNvPicPr>
+            <a:picLocks noChangeAspect="1"/>
+          </p:cNvPicPr>
+          <p:nvPr/>
+        </p:nvPicPr>
+        <p:blipFill>
+          <a:blip r:embed="rId2"/>
+          <a:stretch>
+            <a:fillRect/>
+          </a:stretch>
+        </p:blipFill>
+        <p:spPr>
+          <a:xfrm>
+            <a:off x="548640" y="1143000"/>
+            <a:ext cx="5418666" cy="4571999"/>
+          </a:xfrm>
+          <a:prstGeom prst="rect">
+            <a:avLst/>
+          </a:prstGeom>
+        </p:spPr>
+      </p:pic>
+      <p:sp>
+        <p:nvSpPr>
+          <p:cNvPr id="4" name="TextBox 3"/>
+          <p:cNvSpPr txBox="1"/>
+          <p:nvPr/>
+        </p:nvSpPr>
+        <p:spPr>
+          <a:xfrm>
+            <a:off x="548640" y="5897880"/>
+            <a:ext cx="11064240" cy="411480"/>
+          </a:xfrm>
+          <a:prstGeom prst="rect">
+            <a:avLst/>
+          </a:prstGeom>
+          <a:noFill/>
+        </p:spPr>
+        <p:txBody>
+          <a:bodyPr wrap="square">
+            <a:noAutofit/>
+          </a:bodyPr>
+          <a:lstStyle/>
+          <a:p>
+            <a:pPr>
+              <a:lnSpc>
+                <a:spcPts val="2200"/>
+              </a:lnSpc>
+            </a:pPr>
+            <a:r>
+              <a:rPr sz="1200" b="0">
+                <a:solidFill>
+                  <a:srgbClr val="333333"/>
+                </a:solidFill>
+                <a:latin typeface="Calibri"/>
+              </a:rPr>
+              <a:t>Lab dans le navigateur, état de départ</a:t>
+            </a:r>
+          </a:p>
+        </p:txBody>
+      </p:sp>
+      <p:sp>
+        <p:nvSpPr>
+          <p:cNvPr id="5" name="TextBox 4"/>
+          <p:cNvSpPr txBox="1"/>
+          <p:nvPr/>
+        </p:nvSpPr>
+        <p:spPr>
+          <a:xfrm>
+            <a:off x="548640" y="6355080"/>
+            <a:ext cx="11064240" cy="320040"/>
+          </a:xfrm>
+          <a:prstGeom prst="rect">
+            <a:avLst/>
+          </a:prstGeom>
+          <a:noFill/>
+        </p:spPr>
+        <p:txBody>
+          <a:bodyPr wrap="square">
+            <a:noAutofit/>
+          </a:bodyPr>
+          <a:lstStyle/>
+          <a:p>
+            <a:pPr algn="r">
+              <a:lnSpc>
+                <a:spcPts val="2200"/>
+              </a:lnSpc>
+              <a:defRPr sz="1000" b="0">
+                <a:solidFill>
+                  <a:srgbClr val="666666"/>
+                </a:solidFill>
+                <a:latin typeface="Calibri"/>
+              </a:defRPr>
+            </a:pPr>
+            <a:r>
+              <a:t>learn_partitioning — 03 bipartition initiale</a:t>
+            </a:r>
+          </a:p>
+        </p:txBody>
+      </p:sp>
+    </p:spTree>
+  </p:cSld>
+  <p:clrMapOvr>
+    <a:masterClrMapping/>
+  </p:clrMapOvr>
+</p:sld>
+</file>
+
+<file path=ppt/slides/slide27.xml><?xml version="1.0" encoding="utf-8"?>
+<p:sld xmlns:a="http://schemas.openxmlformats.org/drawingml/2006/main" xmlns:p="http://schemas.openxmlformats.org/presentationml/2006/main" xmlns:r="http://schemas.openxmlformats.org/officeDocument/2006/relationships">
+  <p:cSld>
+    <p:spTree>
+      <p:nvGrpSpPr>
+        <p:cNvPr id="1" name=""/>
+        <p:cNvGrpSpPr/>
+        <p:nvPr/>
+      </p:nvGrpSpPr>
+      <p:grpSpPr/>
+      <p:sp>
+        <p:nvSpPr>
+          <p:cNvPr id="2" name="TextBox 1"/>
+          <p:cNvSpPr txBox="1"/>
+          <p:nvPr/>
+        </p:nvSpPr>
+        <p:spPr>
+          <a:xfrm>
+            <a:off x="548640" y="411480"/>
+            <a:ext cx="11064240" cy="777240"/>
+          </a:xfrm>
+          <a:prstGeom prst="rect">
+            <a:avLst/>
+          </a:prstGeom>
+          <a:noFill/>
+        </p:spPr>
+        <p:txBody>
+          <a:bodyPr wrap="square">
+            <a:noAutofit/>
+          </a:bodyPr>
+          <a:lstStyle/>
+          <a:p>
+            <a:pPr>
+              <a:lnSpc>
+                <a:spcPts val="2200"/>
+              </a:lnSpc>
+            </a:pPr>
+            <a:r>
+              <a:rPr sz="2800" b="1">
+                <a:solidFill>
+                  <a:srgbClr val="1A1A2E"/>
+                </a:solidFill>
+                <a:latin typeface="Calibri"/>
+              </a:rPr>
+              <a:t>Parcours implémentation</a:t>
+            </a:r>
+          </a:p>
+        </p:txBody>
+      </p:sp>
+      <p:pic>
+        <p:nvPicPr>
+          <p:cNvPr id="3" name="Picture 2" descr="real-shell.png"/>
+          <p:cNvPicPr>
+            <a:picLocks noChangeAspect="1"/>
+          </p:cNvPicPr>
+          <p:nvPr/>
+        </p:nvPicPr>
+        <p:blipFill>
+          <a:blip r:embed="rId2"/>
+          <a:stretch>
+            <a:fillRect/>
+          </a:stretch>
+        </p:blipFill>
+        <p:spPr>
+          <a:xfrm>
+            <a:off x="548640" y="1143000"/>
+            <a:ext cx="9160625" cy="4572000"/>
+          </a:xfrm>
+          <a:prstGeom prst="rect">
+            <a:avLst/>
+          </a:prstGeom>
+        </p:spPr>
+      </p:pic>
+      <p:sp>
+        <p:nvSpPr>
+          <p:cNvPr id="4" name="TextBox 3"/>
+          <p:cNvSpPr txBox="1"/>
+          <p:nvPr/>
+        </p:nvSpPr>
+        <p:spPr>
+          <a:xfrm>
+            <a:off x="548640" y="5897880"/>
+            <a:ext cx="11064240" cy="411480"/>
+          </a:xfrm>
+          <a:prstGeom prst="rect">
+            <a:avLst/>
+          </a:prstGeom>
+          <a:noFill/>
+        </p:spPr>
+        <p:txBody>
+          <a:bodyPr wrap="square">
+            <a:noAutofit/>
+          </a:bodyPr>
+          <a:lstStyle/>
+          <a:p>
+            <a:pPr>
+              <a:lnSpc>
+                <a:spcPts val="2200"/>
+              </a:lnSpc>
+            </a:pPr>
+            <a:r>
+              <a:rPr sz="1200" b="0">
+                <a:solidFill>
+                  <a:srgbClr val="333333"/>
+                </a:solidFill>
+                <a:latin typeface="Calibri"/>
+              </a:rPr>
+              <a:t>Une vraie session de terminal</a:t>
+            </a:r>
+          </a:p>
+        </p:txBody>
+      </p:sp>
+      <p:sp>
+        <p:nvSpPr>
+          <p:cNvPr id="5" name="TextBox 4"/>
+          <p:cNvSpPr txBox="1"/>
+          <p:nvPr/>
+        </p:nvSpPr>
+        <p:spPr>
+          <a:xfrm>
+            <a:off x="548640" y="6355080"/>
+            <a:ext cx="11064240" cy="320040"/>
+          </a:xfrm>
+          <a:prstGeom prst="rect">
+            <a:avLst/>
+          </a:prstGeom>
+          <a:noFill/>
+        </p:spPr>
+        <p:txBody>
+          <a:bodyPr wrap="square">
+            <a:noAutofit/>
+          </a:bodyPr>
+          <a:lstStyle/>
+          <a:p>
+            <a:pPr algn="r">
+              <a:lnSpc>
+                <a:spcPts val="2200"/>
+              </a:lnSpc>
+              <a:defRPr sz="1000" b="0">
+                <a:solidFill>
+                  <a:srgbClr val="666666"/>
+                </a:solidFill>
+                <a:latin typeface="Calibri"/>
+              </a:defRPr>
+            </a:pPr>
+            <a:r>
+              <a:t>learn_partitioning — 03 bipartition initiale</a:t>
+            </a:r>
+          </a:p>
+        </p:txBody>
+      </p:sp>
+    </p:spTree>
+  </p:cSld>
+  <p:clrMapOvr>
+    <a:masterClrMapping/>
+  </p:clrMapOvr>
+</p:sld>
+</file>
+
+<file path=ppt/slides/slide28.xml><?xml version="1.0" encoding="utf-8"?>
+<p:sld xmlns:a="http://schemas.openxmlformats.org/drawingml/2006/main" xmlns:p="http://schemas.openxmlformats.org/presentationml/2006/main" xmlns:r="http://schemas.openxmlformats.org/officeDocument/2006/relationships">
+  <p:cSld>
+    <p:spTree>
+      <p:nvGrpSpPr>
+        <p:cNvPr id="1" name=""/>
+        <p:cNvGrpSpPr/>
+        <p:nvPr/>
+      </p:nvGrpSpPr>
+      <p:grpSpPr/>
+      <p:sp>
+        <p:nvSpPr>
+          <p:cNvPr id="2" name="TextBox 1"/>
+          <p:cNvSpPr txBox="1"/>
+          <p:nvPr/>
+        </p:nvSpPr>
+        <p:spPr>
+          <a:xfrm>
+            <a:off x="548640" y="411480"/>
+            <a:ext cx="11064240" cy="777240"/>
+          </a:xfrm>
+          <a:prstGeom prst="rect">
+            <a:avLst/>
+          </a:prstGeom>
+          <a:noFill/>
+        </p:spPr>
+        <p:txBody>
+          <a:bodyPr wrap="square">
+            <a:noAutofit/>
+          </a:bodyPr>
+          <a:lstStyle/>
+          <a:p>
+            <a:pPr>
+              <a:lnSpc>
+                <a:spcPts val="2200"/>
+              </a:lnSpc>
+            </a:pPr>
+            <a:r>
+              <a:rPr sz="2800" b="1">
+                <a:solidFill>
+                  <a:srgbClr val="1A1A2E"/>
+                </a:solidFill>
+                <a:latin typeface="Calibri"/>
+              </a:rPr>
+              <a:t>Parcours implémentation — à essayer</a:t>
+            </a:r>
+          </a:p>
+        </p:txBody>
+      </p:sp>
+      <p:sp>
+        <p:nvSpPr>
+          <p:cNvPr id="3" name="TextBox 2"/>
+          <p:cNvSpPr txBox="1"/>
+          <p:nvPr/>
+        </p:nvSpPr>
+        <p:spPr>
+          <a:xfrm>
+            <a:off x="548640" y="1143000"/>
+            <a:ext cx="11064240" cy="5029200"/>
+          </a:xfrm>
+          <a:prstGeom prst="rect">
+            <a:avLst/>
+          </a:prstGeom>
+          <a:solidFill>
+            <a:srgbClr val="F4F4F4"/>
+          </a:solidFill>
+        </p:spPr>
+        <p:txBody>
+          <a:bodyPr wrap="square">
+            <a:noAutofit/>
+          </a:bodyPr>
+          <a:lstStyle/>
+          <a:p>
+            <a:pPr>
+              <a:lnSpc>
+                <a:spcPts val="2200"/>
+              </a:lnSpc>
+              <a:spcAft>
+                <a:spcPts val="400"/>
+              </a:spcAft>
+            </a:pPr>
+            <a:r>
+              <a:rPr sz="2000" b="0">
+                <a:solidFill>
+                  <a:srgbClr val="333333"/>
+                </a:solidFill>
+                <a:latin typeface="Consolas"/>
+              </a:rPr>
+              <a:t># afficher toutes les bonnes réponses</a:t>
+            </a:r>
+          </a:p>
+          <a:p>
+            <a:pPr>
+              <a:lnSpc>
+                <a:spcPts val="2200"/>
+              </a:lnSpc>
+              <a:spcAft>
+                <a:spcPts val="400"/>
+              </a:spcAft>
+            </a:pPr>
+            <a:r>
+              <a:rPr sz="2000" b="0">
+                <a:solidFill>
+                  <a:srgbClr val="333333"/>
+                </a:solidFill>
+                <a:latin typeface="Consolas"/>
+              </a:rPr>
+              <a:t>python3 examples/initial_bipartition_check.py --show</a:t>
+            </a:r>
+          </a:p>
+          <a:p>
+            <a:pPr>
+              <a:lnSpc>
+                <a:spcPts val="2200"/>
+              </a:lnSpc>
+              <a:spcAft>
+                <a:spcPts val="400"/>
+              </a:spcAft>
+            </a:pPr>
+            <a:r>
+              <a:rPr sz="2000" b="0">
+                <a:solidFill>
+                  <a:srgbClr val="333333"/>
+                </a:solidFill>
+                <a:latin typeface="Consolas"/>
+              </a:rPr>
+              <a:t/>
+            </a:r>
+          </a:p>
+          <a:p>
+            <a:pPr>
+              <a:lnSpc>
+                <a:spcPts val="2200"/>
+              </a:lnSpc>
+              <a:spcAft>
+                <a:spcPts val="400"/>
+              </a:spcAft>
+            </a:pPr>
+            <a:r>
+              <a:rPr sz="2000" b="0">
+                <a:solidFill>
+                  <a:srgbClr val="333333"/>
+                </a:solidFill>
+                <a:latin typeface="Consolas"/>
+              </a:rPr>
+              <a:t># vérifier vos propres fonctions</a:t>
+            </a:r>
+          </a:p>
+          <a:p>
+            <a:pPr>
+              <a:lnSpc>
+                <a:spcPts val="2200"/>
+              </a:lnSpc>
+              <a:spcAft>
+                <a:spcPts val="400"/>
+              </a:spcAft>
+            </a:pPr>
+            <a:r>
+              <a:rPr sz="2000" b="0">
+                <a:solidFill>
+                  <a:srgbClr val="333333"/>
+                </a:solidFill>
+                <a:latin typeface="Consolas"/>
+              </a:rPr>
+              <a:t>python3 examples/initial_bipartition_check.py --impl my_init.py</a:t>
+            </a:r>
+          </a:p>
+        </p:txBody>
+      </p:sp>
+      <p:sp>
+        <p:nvSpPr>
+          <p:cNvPr id="4" name="TextBox 3"/>
+          <p:cNvSpPr txBox="1"/>
+          <p:nvPr/>
+        </p:nvSpPr>
+        <p:spPr>
+          <a:xfrm>
+            <a:off x="548640" y="6355080"/>
+            <a:ext cx="11064240" cy="320040"/>
+          </a:xfrm>
+          <a:prstGeom prst="rect">
+            <a:avLst/>
+          </a:prstGeom>
+          <a:noFill/>
+        </p:spPr>
+        <p:txBody>
+          <a:bodyPr wrap="square">
+            <a:noAutofit/>
+          </a:bodyPr>
+          <a:lstStyle/>
+          <a:p>
+            <a:pPr algn="r">
+              <a:lnSpc>
+                <a:spcPts val="2200"/>
+              </a:lnSpc>
+              <a:defRPr sz="1000" b="0">
+                <a:solidFill>
+                  <a:srgbClr val="666666"/>
+                </a:solidFill>
+                <a:latin typeface="Calibri"/>
+              </a:defRPr>
+            </a:pPr>
+            <a:r>
+              <a:t>learn_partitioning — 03 bipartition initiale</a:t>
+            </a:r>
+          </a:p>
+        </p:txBody>
+      </p:sp>
+    </p:spTree>
+  </p:cSld>
+  <p:clrMapOvr>
+    <a:masterClrMapping/>
+  </p:clrMapOvr>
+</p:sld>
+</file>
+
+<file path=ppt/slides/slide29.xml><?xml version="1.0" encoding="utf-8"?>
+<p:sld xmlns:a="http://schemas.openxmlformats.org/drawingml/2006/main" xmlns:p="http://schemas.openxmlformats.org/presentationml/2006/main" xmlns:r="http://schemas.openxmlformats.org/officeDocument/2006/relationships">
+  <p:cSld>
+    <p:spTree>
+      <p:nvGrpSpPr>
+        <p:cNvPr id="1" name=""/>
+        <p:cNvGrpSpPr/>
+        <p:nvPr/>
+      </p:nvGrpSpPr>
+      <p:grpSpPr/>
+      <p:sp>
+        <p:nvSpPr>
+          <p:cNvPr id="2" name="TextBox 1"/>
+          <p:cNvSpPr txBox="1"/>
+          <p:nvPr/>
+        </p:nvSpPr>
+        <p:spPr>
+          <a:xfrm>
+            <a:off x="548640" y="411480"/>
+            <a:ext cx="11064240" cy="777240"/>
+          </a:xfrm>
+          <a:prstGeom prst="rect">
+            <a:avLst/>
+          </a:prstGeom>
+          <a:noFill/>
+        </p:spPr>
+        <p:txBody>
+          <a:bodyPr wrap="square">
+            <a:noAutofit/>
+          </a:bodyPr>
+          <a:lstStyle/>
+          <a:p>
+            <a:pPr>
+              <a:lnSpc>
+                <a:spcPts val="2200"/>
+              </a:lnSpc>
+            </a:pPr>
+            <a:r>
+              <a:rPr sz="2800" b="1">
+                <a:solidFill>
+                  <a:srgbClr val="1A1A2E"/>
+                </a:solidFill>
+                <a:latin typeface="Calibri"/>
+              </a:rPr>
+              <a:t>À retenir</a:t>
+            </a:r>
+          </a:p>
+        </p:txBody>
+      </p:sp>
+      <p:sp>
+        <p:nvSpPr>
+          <p:cNvPr id="3" name="TextBox 2"/>
+          <p:cNvSpPr txBox="1"/>
+          <p:nvPr/>
+        </p:nvSpPr>
+        <p:spPr>
+          <a:xfrm>
+            <a:off x="548640" y="1234440"/>
+            <a:ext cx="11064240" cy="4937760"/>
+          </a:xfrm>
+          <a:prstGeom prst="rect">
+            <a:avLst/>
+          </a:prstGeom>
+          <a:noFill/>
+        </p:spPr>
+        <p:txBody>
+          <a:bodyPr wrap="square">
+            <a:noAutofit/>
+          </a:bodyPr>
+          <a:lstStyle/>
+          <a:p>
+            <a:pPr lvl="0" marL="457200" indent="-228600">
+              <a:buFont typeface="Calibri"/>
+              <a:spcAft>
+                <a:spcPts val="1000"/>
+              </a:spcAft>
+              <a:buSzPct val="100000"/>
+              <a:buChar char="•"/>
+              <a:lnSpc>
+                <a:spcPts val="2200"/>
+              </a:lnSpc>
+            </a:pPr>
+            <a:r>
+              <a:rPr sz="2000" b="0">
+                <a:solidFill>
+                  <a:srgbClr val="333333"/>
+                </a:solidFill>
+                <a:latin typeface="Calibri"/>
+              </a:rPr>
+              <a:t>L'aléatoire est rapide, mais il dépend de la chance</a:t>
+            </a:r>
+          </a:p>
+          <a:p>
+            <a:pPr lvl="0" marL="457200" indent="-228600">
+              <a:buFont typeface="Calibri"/>
+              <a:spcAft>
+                <a:spcPts val="1000"/>
+              </a:spcAft>
+              <a:buSzPct val="100000"/>
+              <a:buChar char="•"/>
+              <a:lnSpc>
+                <a:spcPts val="2200"/>
+              </a:lnSpc>
+            </a:pPr>
+            <a:r>
+              <a:rPr sz="2000" b="0">
+                <a:solidFill>
+                  <a:srgbClr val="333333"/>
+                </a:solidFill>
+                <a:latin typeface="Calibri"/>
+              </a:rPr>
+              <a:t>Le glouton garde les arêtes lourdes dedans, mais égalités et ponts le trompent</a:t>
+            </a:r>
+          </a:p>
+          <a:p>
+            <a:pPr lvl="0" marL="457200" indent="-228600">
+              <a:buFont typeface="Calibri"/>
+              <a:spcAft>
+                <a:spcPts val="1000"/>
+              </a:spcAft>
+              <a:buSzPct val="100000"/>
+              <a:buChar char="•"/>
+              <a:lnSpc>
+                <a:spcPts val="2200"/>
+              </a:lnSpc>
+            </a:pPr>
+            <a:r>
+              <a:rPr sz="2000" b="0">
+                <a:solidFill>
+                  <a:srgbClr val="333333"/>
+                </a:solidFill>
+                <a:latin typeface="Calibri"/>
+              </a:rPr>
+              <a:t>La croissance dépend de son nœud de départ</a:t>
+            </a:r>
+          </a:p>
+          <a:p>
+            <a:pPr lvl="0" marL="457200" indent="-228600">
+              <a:buFont typeface="Calibri"/>
+              <a:spcAft>
+                <a:spcPts val="1000"/>
+              </a:spcAft>
+              <a:buSzPct val="100000"/>
+              <a:buChar char="•"/>
+              <a:lnSpc>
+                <a:spcPts val="2200"/>
+              </a:lnSpc>
+            </a:pPr>
+            <a:r>
+              <a:rPr sz="2000" b="0">
+                <a:solidFill>
+                  <a:srgbClr val="333333"/>
+                </a:solidFill>
+                <a:latin typeface="Calibri"/>
+              </a:rPr>
+              <a:t>Donnez l'équilibre avec chaque coupe, et ne laissez aucun côté dépasser sa limite</a:t>
+            </a:r>
+          </a:p>
+          <a:p>
+            <a:pPr lvl="0" marL="457200" indent="-228600">
+              <a:buFont typeface="Calibri"/>
+              <a:spcAft>
+                <a:spcPts val="1000"/>
+              </a:spcAft>
+              <a:buSzPct val="100000"/>
+              <a:buChar char="•"/>
+              <a:lnSpc>
+                <a:spcPts val="2200"/>
+              </a:lnSpc>
+            </a:pPr>
+            <a:r>
+              <a:rPr sz="2000" b="0">
+                <a:solidFill>
+                  <a:srgbClr val="333333"/>
+                </a:solidFill>
+                <a:latin typeface="Calibri"/>
+              </a:rPr>
+              <a:t>Départagez par le nom, pas par l'ordre du fichier d'entrée</a:t>
+            </a:r>
+          </a:p>
+          <a:p>
+            <a:pPr lvl="0" marL="457200" indent="-228600">
+              <a:buFont typeface="Calibri"/>
+              <a:spcAft>
+                <a:spcPts val="1000"/>
+              </a:spcAft>
+              <a:buSzPct val="100000"/>
+              <a:buChar char="•"/>
+              <a:lnSpc>
+                <a:spcPts val="2200"/>
+              </a:lnSpc>
+            </a:pPr>
+            <a:r>
+              <a:rPr sz="2000" b="0">
+                <a:solidFill>
+                  <a:srgbClr val="333333"/>
+                </a:solidFill>
+                <a:latin typeface="Calibri"/>
+              </a:rPr>
+              <a:t>Donc : essayer plusieurs départs, garder le meilleur départ valide</a:t>
             </a:r>
           </a:p>
         </p:txBody>
@@ -8390,7 +9885,7 @@
                 </a:solidFill>
                 <a:latin typeface="Calibri"/>
               </a:rPr>
-              <a:t>Deux nombres : coupe et équilibre</a:t>
+              <a:t>Les cellules deviennent des points, les fils des traits</a:t>
             </a:r>
           </a:p>
         </p:txBody>
@@ -8435,7 +9930,7 @@
                 </a:solidFill>
                 <a:latin typeface="Calibri"/>
               </a:rPr>
-              <a:t>Couper une puce en deux côtés s'appelle une bipartition</a:t>
+              <a:t>On dessine chaque cellule comme un point, appelé nœud</a:t>
             </a:r>
           </a:p>
           <a:p>
@@ -8457,7 +9952,7 @@
                 </a:solidFill>
                 <a:latin typeface="Calibri"/>
               </a:rPr>
-              <a:t>Les arêtes qui passent d'un côté à l'autre sont coupées, et on les dessine en rouge</a:t>
+              <a:t>Un trait entre deux nœuds est une arête</a:t>
             </a:r>
           </a:p>
           <a:p>
@@ -8479,7 +9974,7 @@
                 </a:solidFill>
                 <a:latin typeface="Calibri"/>
               </a:rPr>
-              <a:t>La taille de coupe additionne leurs poids : ici, deux plus un font trois</a:t>
+              <a:t>Son nombre, le poids, compte les fils entre les deux cellules</a:t>
             </a:r>
           </a:p>
           <a:p>
@@ -8501,58 +9996,14 @@
                 </a:solidFill>
                 <a:latin typeface="Calibri"/>
               </a:rPr>
-              <a:t>Tout mettre du même côté donne une coupe de zéro, mais cela ne sert à rien</a:t>
-            </a:r>
-          </a:p>
-          <a:p>
-            <a:pPr lvl="0" marL="457200" indent="-228600">
-              <a:buFont typeface="Calibri"/>
-              <a:spcAft>
-                <a:spcPts val="1000"/>
-              </a:spcAft>
-              <a:buSzPct val="100000"/>
-              <a:buChar char="•"/>
-              <a:lnSpc>
-                <a:spcPts val="2200"/>
-              </a:lnSpc>
-            </a:pPr>
-            <a:r>
-              <a:rPr sz="2000" b="0">
-                <a:solidFill>
-                  <a:srgbClr val="333333"/>
-                </a:solidFill>
-                <a:latin typeface="Calibri"/>
-              </a:rPr>
-              <a:t>On vérifie donc aussi l'équilibre : combien de cellules chaque côté contient</a:t>
-            </a:r>
-          </a:p>
-          <a:p>
-            <a:pPr lvl="0" marL="457200" indent="-228600">
-              <a:buFont typeface="Calibri"/>
-              <a:spcAft>
-                <a:spcPts val="1000"/>
-              </a:spcAft>
-              <a:buSzPct val="100000"/>
-              <a:buChar char="•"/>
-              <a:lnSpc>
-                <a:spcPts val="2200"/>
-              </a:lnSpc>
-            </a:pPr>
-            <a:r>
-              <a:rPr sz="2000" b="0">
-                <a:solidFill>
-                  <a:srgbClr val="333333"/>
-                </a:solidFill>
-                <a:latin typeface="Calibri"/>
-              </a:rPr>
-              <a:t>Une partition est valide quand aucun côté ne dépasse trois cellules sur cinq</a:t>
+              <a:t>A–B et D–E sont les plus lourdes, avec cinq fils chacune</a:t>
             </a:r>
           </a:p>
         </p:txBody>
       </p:sp>
       <p:pic>
         <p:nvPicPr>
-          <p:cNvPr id="4" name="Picture 3" descr="cut-and-balance.png"/>
+          <p:cNvPr id="4" name="Picture 3" descr="chip-to-graph.png"/>
           <p:cNvPicPr>
             <a:picLocks noChangeAspect="1"/>
           </p:cNvPicPr>
@@ -8567,7 +10018,7 @@
         <p:spPr>
           <a:xfrm>
             <a:off x="6172200" y="1234440"/>
-            <a:ext cx="4007853" cy="4754879"/>
+            <a:ext cx="3978092" cy="4754879"/>
           </a:xfrm>
           <a:prstGeom prst="rect">
             <a:avLst/>
@@ -8577,6 +10028,235 @@
       <p:sp>
         <p:nvSpPr>
           <p:cNvPr id="5" name="TextBox 4"/>
+          <p:cNvSpPr txBox="1"/>
+          <p:nvPr/>
+        </p:nvSpPr>
+        <p:spPr>
+          <a:xfrm>
+            <a:off x="548640" y="6355080"/>
+            <a:ext cx="11064240" cy="320040"/>
+          </a:xfrm>
+          <a:prstGeom prst="rect">
+            <a:avLst/>
+          </a:prstGeom>
+          <a:noFill/>
+        </p:spPr>
+        <p:txBody>
+          <a:bodyPr wrap="square">
+            <a:noAutofit/>
+          </a:bodyPr>
+          <a:lstStyle/>
+          <a:p>
+            <a:pPr algn="r">
+              <a:lnSpc>
+                <a:spcPts val="2200"/>
+              </a:lnSpc>
+              <a:defRPr sz="1000" b="0">
+                <a:solidFill>
+                  <a:srgbClr val="666666"/>
+                </a:solidFill>
+                <a:latin typeface="Calibri"/>
+              </a:defRPr>
+            </a:pPr>
+            <a:r>
+              <a:t>learn_partitioning — 03 bipartition initiale</a:t>
+            </a:r>
+          </a:p>
+        </p:txBody>
+      </p:sp>
+    </p:spTree>
+  </p:cSld>
+  <p:clrMapOvr>
+    <a:masterClrMapping/>
+  </p:clrMapOvr>
+</p:sld>
+</file>
+
+<file path=ppt/slides/slide30.xml><?xml version="1.0" encoding="utf-8"?>
+<p:sld xmlns:a="http://schemas.openxmlformats.org/drawingml/2006/main" xmlns:p="http://schemas.openxmlformats.org/presentationml/2006/main" xmlns:r="http://schemas.openxmlformats.org/officeDocument/2006/relationships">
+  <p:cSld>
+    <p:spTree>
+      <p:nvGrpSpPr>
+        <p:cNvPr id="1" name=""/>
+        <p:cNvGrpSpPr/>
+        <p:nvPr/>
+      </p:nvGrpSpPr>
+      <p:grpSpPr/>
+      <p:sp>
+        <p:nvSpPr>
+          <p:cNvPr id="2" name="TextBox 1"/>
+          <p:cNvSpPr txBox="1"/>
+          <p:nvPr/>
+        </p:nvSpPr>
+        <p:spPr>
+          <a:xfrm>
+            <a:off x="548640" y="411480"/>
+            <a:ext cx="11064240" cy="777240"/>
+          </a:xfrm>
+          <a:prstGeom prst="rect">
+            <a:avLst/>
+          </a:prstGeom>
+          <a:noFill/>
+        </p:spPr>
+        <p:txBody>
+          <a:bodyPr wrap="square">
+            <a:noAutofit/>
+          </a:bodyPr>
+          <a:lstStyle/>
+          <a:p>
+            <a:pPr>
+              <a:lnSpc>
+                <a:spcPts val="2200"/>
+              </a:lnSpc>
+            </a:pPr>
+            <a:r>
+              <a:rPr sz="2800" b="1">
+                <a:solidFill>
+                  <a:srgbClr val="1A1A2E"/>
+                </a:solidFill>
+                <a:latin typeface="Calibri"/>
+              </a:rPr>
+              <a:t>À vous de jouer</a:t>
+            </a:r>
+          </a:p>
+        </p:txBody>
+      </p:sp>
+      <p:sp>
+        <p:nvSpPr>
+          <p:cNvPr id="3" name="TextBox 2"/>
+          <p:cNvSpPr txBox="1"/>
+          <p:nvPr/>
+        </p:nvSpPr>
+        <p:spPr>
+          <a:xfrm>
+            <a:off x="548640" y="1234440"/>
+            <a:ext cx="11064240" cy="4937760"/>
+          </a:xfrm>
+          <a:prstGeom prst="rect">
+            <a:avLst/>
+          </a:prstGeom>
+          <a:noFill/>
+        </p:spPr>
+        <p:txBody>
+          <a:bodyPr wrap="square">
+            <a:noAutofit/>
+          </a:bodyPr>
+          <a:lstStyle/>
+          <a:p>
+            <a:pPr lvl="0" marL="457200" indent="-228600">
+              <a:buFont typeface="Calibri"/>
+              <a:spcAft>
+                <a:spcPts val="1000"/>
+              </a:spcAft>
+              <a:buSzPct val="100000"/>
+              <a:buChar char="•"/>
+              <a:lnSpc>
+                <a:spcPts val="2200"/>
+              </a:lnSpc>
+            </a:pPr>
+            <a:r>
+              <a:rPr sz="2000" b="0">
+                <a:solidFill>
+                  <a:srgbClr val="333333"/>
+                </a:solidFill>
+                <a:latin typeface="Calibri"/>
+              </a:rPr>
+              <a:t>Choisissez un parcours : le lab dans le navigateur, Python, ou les deux</a:t>
+            </a:r>
+          </a:p>
+          <a:p>
+            <a:pPr lvl="0" marL="457200" indent="-228600">
+              <a:buFont typeface="Calibri"/>
+              <a:spcAft>
+                <a:spcPts val="1000"/>
+              </a:spcAft>
+              <a:buSzPct val="100000"/>
+              <a:buChar char="•"/>
+              <a:lnSpc>
+                <a:spcPts val="2200"/>
+              </a:lnSpc>
+            </a:pPr>
+            <a:r>
+              <a:rPr sz="2000" b="0">
+                <a:solidFill>
+                  <a:srgbClr val="333333"/>
+                </a:solidFill>
+                <a:latin typeface="Calibri"/>
+              </a:rPr>
+              <a:t>Cochez chaque case de la liste de contrôle, puis faites le court quiz</a:t>
+            </a:r>
+          </a:p>
+          <a:p>
+            <a:pPr lvl="0" marL="457200" indent="-228600">
+              <a:buFont typeface="Calibri"/>
+              <a:spcAft>
+                <a:spcPts val="1000"/>
+              </a:spcAft>
+              <a:buSzPct val="100000"/>
+              <a:buChar char="•"/>
+              <a:lnSpc>
+                <a:spcPts val="2200"/>
+              </a:lnSpc>
+            </a:pPr>
+            <a:r>
+              <a:rPr sz="2000" b="0">
+                <a:solidFill>
+                  <a:srgbClr val="333333"/>
+                </a:solidFill>
+                <a:latin typeface="Calibri"/>
+              </a:rPr>
+              <a:t>La suite, c'est Kernighan–Lin, qui part de votre partition et l'améliore</a:t>
+            </a:r>
+          </a:p>
+          <a:p>
+            <a:pPr lvl="0" marL="457200" indent="-228600">
+              <a:buFont typeface="Calibri"/>
+              <a:spcAft>
+                <a:spcPts val="1000"/>
+              </a:spcAft>
+              <a:buSzPct val="100000"/>
+              <a:buChar char="•"/>
+              <a:lnSpc>
+                <a:spcPts val="2200"/>
+              </a:lnSpc>
+            </a:pPr>
+            <a:r>
+              <a:rPr sz="2000" b="0">
+                <a:solidFill>
+                  <a:srgbClr val="333333"/>
+                </a:solidFill>
+                <a:latin typeface="Calibri"/>
+              </a:rPr>
+              <a:t>Faites une pause et devinez : de combien peut-il réduire la coupe malchanceuse de seize ?</a:t>
+            </a:r>
+          </a:p>
+          <a:p>
+            <a:pPr lvl="0" marL="457200" indent="-228600">
+              <a:buFont typeface="Calibri"/>
+              <a:spcAft>
+                <a:spcPts val="1000"/>
+              </a:spcAft>
+              <a:buSzPct val="100000"/>
+              <a:buChar char="•"/>
+              <a:lnSpc>
+                <a:spcPts val="2200"/>
+              </a:lnSpc>
+            </a:pPr>
+            <a:r>
+              <a:rPr sz="2000" b="0">
+                <a:solidFill>
+                  <a:srgbClr val="333333"/>
+                </a:solidFill>
+                <a:latin typeface="Calibri"/>
+              </a:rPr>
+              <a:t>Le lab quatre vous le montrera</a:t>
+            </a:r>
+          </a:p>
+        </p:txBody>
+      </p:sp>
+      <p:sp>
+        <p:nvSpPr>
+          <p:cNvPr id="4" name="TextBox 3"/>
           <p:cNvSpPr txBox="1"/>
           <p:nvPr/>
         </p:nvSpPr>
@@ -8665,7 +10345,7 @@
                 </a:solidFill>
                 <a:latin typeface="Calibri"/>
               </a:rPr>
-              <a:t>Pourquoi une partition de départ ?</a:t>
+              <a:t>Deux nombres : coupe et équilibre</a:t>
             </a:r>
           </a:p>
         </p:txBody>
@@ -8679,7 +10359,7 @@
         <p:spPr>
           <a:xfrm>
             <a:off x="548640" y="1234440"/>
-            <a:ext cx="11064240" cy="4937760"/>
+            <a:ext cx="5303520" cy="4754880"/>
           </a:xfrm>
           <a:prstGeom prst="rect">
             <a:avLst/>
@@ -8710,7 +10390,7 @@
                 </a:solidFill>
                 <a:latin typeface="Calibri"/>
               </a:rPr>
-              <a:t>Les labs quatre et cinq enseignent deux méthodes célèbres, appelées KL et FM</a:t>
+              <a:t>Couper les cellules en deux côtés s'appelle une bipartition</a:t>
             </a:r>
           </a:p>
           <a:p>
@@ -8732,7 +10412,7 @@
                 </a:solidFill>
                 <a:latin typeface="Calibri"/>
               </a:rPr>
-              <a:t>Elles améliorent une partition en déplaçant des cellules d'un côté à l'autre</a:t>
+              <a:t>Les arêtes qui passent d'un côté à l'autre sont coupées, et dessinées en rouge</a:t>
             </a:r>
           </a:p>
           <a:p>
@@ -8754,80 +10434,38 @@
                 </a:solidFill>
                 <a:latin typeface="Calibri"/>
               </a:rPr>
-              <a:t>Mais elles ne peuvent qu'améliorer : il leur faut une partition valide pour démarrer</a:t>
-            </a:r>
-          </a:p>
-          <a:p>
-            <a:pPr lvl="0" marL="457200" indent="-228600">
-              <a:buFont typeface="Calibri"/>
-              <a:spcAft>
-                <a:spcPts val="1000"/>
-              </a:spcAft>
-              <a:buSzPct val="100000"/>
-              <a:buChar char="•"/>
-              <a:lnSpc>
-                <a:spcPts val="2200"/>
-              </a:lnSpc>
-            </a:pPr>
-            <a:r>
-              <a:rPr sz="2000" b="0">
-                <a:solidFill>
-                  <a:srgbClr val="333333"/>
-                </a:solidFill>
-                <a:latin typeface="Calibri"/>
-              </a:rPr>
-              <a:t>Pensez à former deux équipes pour un jeu</a:t>
-            </a:r>
-          </a:p>
-          <a:p>
-            <a:pPr lvl="0" marL="457200" indent="-228600">
-              <a:buFont typeface="Calibri"/>
-              <a:spcAft>
-                <a:spcPts val="1000"/>
-              </a:spcAft>
-              <a:buSzPct val="100000"/>
-              <a:buChar char="•"/>
-              <a:lnSpc>
-                <a:spcPts val="2200"/>
-              </a:lnSpc>
-            </a:pPr>
-            <a:r>
-              <a:rPr sz="2000" b="0">
-                <a:solidFill>
-                  <a:srgbClr val="333333"/>
-                </a:solidFill>
-                <a:latin typeface="Calibri"/>
-              </a:rPr>
-              <a:t>D'abord deux équipes au hasard, puis on échange des joueurs pour équilibrer</a:t>
-            </a:r>
-          </a:p>
-          <a:p>
-            <a:pPr lvl="0" marL="457200" indent="-228600">
-              <a:buFont typeface="Calibri"/>
-              <a:spcAft>
-                <a:spcPts val="1000"/>
-              </a:spcAft>
-              <a:buSzPct val="100000"/>
-              <a:buChar char="•"/>
-              <a:lnSpc>
-                <a:spcPts val="2200"/>
-              </a:lnSpc>
-            </a:pPr>
-            <a:r>
-              <a:rPr sz="2000" b="0">
-                <a:solidFill>
-                  <a:srgbClr val="333333"/>
-                </a:solidFill>
-                <a:latin typeface="Calibri"/>
-              </a:rPr>
-              <a:t>Un bon premier découpage laisse moins d'échanges à faire</a:t>
-            </a:r>
-          </a:p>
-        </p:txBody>
-      </p:sp>
-      <p:sp>
-        <p:nvSpPr>
-          <p:cNvPr id="4" name="TextBox 3"/>
+              <a:t>La taille de coupe additionne leurs poids : ici, deux plus un font trois</a:t>
+            </a:r>
+          </a:p>
+        </p:txBody>
+      </p:sp>
+      <p:pic>
+        <p:nvPicPr>
+          <p:cNvPr id="4" name="Picture 3" descr="cut-and-balance-1.png"/>
+          <p:cNvPicPr>
+            <a:picLocks noChangeAspect="1"/>
+          </p:cNvPicPr>
+          <p:nvPr/>
+        </p:nvPicPr>
+        <p:blipFill>
+          <a:blip r:embed="rId2"/>
+          <a:stretch>
+            <a:fillRect/>
+          </a:stretch>
+        </p:blipFill>
+        <p:spPr>
+          <a:xfrm>
+            <a:off x="6172200" y="1234440"/>
+            <a:ext cx="4007853" cy="4754879"/>
+          </a:xfrm>
+          <a:prstGeom prst="rect">
+            <a:avLst/>
+          </a:prstGeom>
+        </p:spPr>
+      </p:pic>
+      <p:sp>
+        <p:nvSpPr>
+          <p:cNvPr id="5" name="TextBox 4"/>
           <p:cNvSpPr txBox="1"/>
           <p:nvPr/>
         </p:nvSpPr>
@@ -8916,14 +10554,103 @@
                 </a:solidFill>
                 <a:latin typeface="Calibri"/>
               </a:rPr>
-              <a:t>Il faut une partition de départ valide</a:t>
+              <a:t>L'équilibre : aucun côté trop gros</a:t>
+            </a:r>
+          </a:p>
+        </p:txBody>
+      </p:sp>
+      <p:sp>
+        <p:nvSpPr>
+          <p:cNvPr id="3" name="TextBox 2"/>
+          <p:cNvSpPr txBox="1"/>
+          <p:nvPr/>
+        </p:nvSpPr>
+        <p:spPr>
+          <a:xfrm>
+            <a:off x="548640" y="1234440"/>
+            <a:ext cx="5303520" cy="4754880"/>
+          </a:xfrm>
+          <a:prstGeom prst="rect">
+            <a:avLst/>
+          </a:prstGeom>
+          <a:noFill/>
+        </p:spPr>
+        <p:txBody>
+          <a:bodyPr wrap="square">
+            <a:noAutofit/>
+          </a:bodyPr>
+          <a:lstStyle/>
+          <a:p>
+            <a:pPr lvl="0" marL="457200" indent="-228600">
+              <a:buFont typeface="Calibri"/>
+              <a:spcAft>
+                <a:spcPts val="1000"/>
+              </a:spcAft>
+              <a:buSzPct val="100000"/>
+              <a:buChar char="•"/>
+              <a:lnSpc>
+                <a:spcPts val="2200"/>
+              </a:lnSpc>
+            </a:pPr>
+            <a:r>
+              <a:rPr sz="2000" b="0">
+                <a:solidFill>
+                  <a:srgbClr val="333333"/>
+                </a:solidFill>
+                <a:latin typeface="Calibri"/>
+              </a:rPr>
+              <a:t>Tout mettre du même côté donne une coupe de zéro, mais cela ne sert à rien</a:t>
+            </a:r>
+          </a:p>
+          <a:p>
+            <a:pPr lvl="0" marL="457200" indent="-228600">
+              <a:buFont typeface="Calibri"/>
+              <a:spcAft>
+                <a:spcPts val="1000"/>
+              </a:spcAft>
+              <a:buSzPct val="100000"/>
+              <a:buChar char="•"/>
+              <a:lnSpc>
+                <a:spcPts val="2200"/>
+              </a:lnSpc>
+            </a:pPr>
+            <a:r>
+              <a:rPr sz="2000" b="0">
+                <a:solidFill>
+                  <a:srgbClr val="333333"/>
+                </a:solidFill>
+                <a:latin typeface="Calibri"/>
+              </a:rPr>
+              <a:t>On vérifie donc aussi l'équilibre : combien de cellules chaque côté contient</a:t>
+            </a:r>
+          </a:p>
+          <a:p>
+            <a:pPr lvl="0" marL="457200" indent="-228600">
+              <a:buFont typeface="Calibri"/>
+              <a:spcAft>
+                <a:spcPts val="1000"/>
+              </a:spcAft>
+              <a:buSzPct val="100000"/>
+              <a:buChar char="•"/>
+              <a:lnSpc>
+                <a:spcPts val="2200"/>
+              </a:lnSpc>
+            </a:pPr>
+            <a:r>
+              <a:rPr sz="2000" b="0">
+                <a:solidFill>
+                  <a:srgbClr val="333333"/>
+                </a:solidFill>
+                <a:latin typeface="Calibri"/>
+              </a:rPr>
+              <a:t>Une partition est valide quand aucun côté ne dépasse trois cellules sur cinq</a:t>
             </a:r>
           </a:p>
         </p:txBody>
       </p:sp>
       <p:pic>
         <p:nvPicPr>
-          <p:cNvPr id="3" name="Picture 2" descr="01-empty.png"/>
+          <p:cNvPr id="4" name="Picture 3" descr="cut-and-balance.png"/>
           <p:cNvPicPr>
             <a:picLocks noChangeAspect="1"/>
           </p:cNvPicPr>
@@ -8937,53 +10664,14 @@
         </p:blipFill>
         <p:spPr>
           <a:xfrm>
-            <a:off x="548640" y="1143000"/>
-            <a:ext cx="9183076" cy="4572000"/>
+            <a:off x="6172200" y="1234440"/>
+            <a:ext cx="4007853" cy="4754879"/>
           </a:xfrm>
           <a:prstGeom prst="rect">
             <a:avLst/>
           </a:prstGeom>
         </p:spPr>
       </p:pic>
-      <p:sp>
-        <p:nvSpPr>
-          <p:cNvPr id="4" name="TextBox 3"/>
-          <p:cNvSpPr txBox="1"/>
-          <p:nvPr/>
-        </p:nvSpPr>
-        <p:spPr>
-          <a:xfrm>
-            <a:off x="548640" y="5897880"/>
-            <a:ext cx="11064240" cy="411480"/>
-          </a:xfrm>
-          <a:prstGeom prst="rect">
-            <a:avLst/>
-          </a:prstGeom>
-          <a:noFill/>
-        </p:spPr>
-        <p:txBody>
-          <a:bodyPr wrap="square">
-            <a:noAutofit/>
-          </a:bodyPr>
-          <a:lstStyle/>
-          <a:p>
-            <a:pPr>
-              <a:lnSpc>
-                <a:spcPts val="2200"/>
-              </a:lnSpc>
-            </a:pPr>
-            <a:r>
-              <a:rPr sz="1200" b="0">
-                <a:solidFill>
-                  <a:srgbClr val="333333"/>
-                </a:solidFill>
-                <a:latin typeface="Calibri"/>
-              </a:rPr>
-              <a:t>Il faut une partition de départ valide</a:t>
-            </a:r>
-          </a:p>
-        </p:txBody>
-      </p:sp>
       <p:sp>
         <p:nvSpPr>
           <p:cNvPr id="5" name="TextBox 4"/>
@@ -9075,45 +10763,21 @@
                 </a:solidFill>
                 <a:latin typeface="Calibri"/>
               </a:rPr>
-              <a:t>Aléatoire, graine 5 : ABC|DE, coupe 3</a:t>
-            </a:r>
-          </a:p>
-        </p:txBody>
-      </p:sp>
-      <p:pic>
-        <p:nvPicPr>
-          <p:cNvPr id="3" name="Picture 2" descr="02-random-lucky.png"/>
-          <p:cNvPicPr>
-            <a:picLocks noChangeAspect="1"/>
-          </p:cNvPicPr>
-          <p:nvPr/>
-        </p:nvPicPr>
-        <p:blipFill>
-          <a:blip r:embed="rId2"/>
-          <a:stretch>
-            <a:fillRect/>
-          </a:stretch>
-        </p:blipFill>
-        <p:spPr>
-          <a:xfrm>
-            <a:off x="548640" y="1143000"/>
-            <a:ext cx="9183076" cy="4572000"/>
-          </a:xfrm>
-          <a:prstGeom prst="rect">
-            <a:avLst/>
-          </a:prstGeom>
-        </p:spPr>
-      </p:pic>
-      <p:sp>
-        <p:nvSpPr>
-          <p:cNvPr id="4" name="TextBox 3"/>
+              <a:t>Pourquoi une partition de départ ?</a:t>
+            </a:r>
+          </a:p>
+        </p:txBody>
+      </p:sp>
+      <p:sp>
+        <p:nvSpPr>
+          <p:cNvPr id="3" name="TextBox 2"/>
           <p:cNvSpPr txBox="1"/>
           <p:nvPr/>
         </p:nvSpPr>
         <p:spPr>
           <a:xfrm>
-            <a:off x="548640" y="5897880"/>
-            <a:ext cx="11064240" cy="411480"/>
+            <a:off x="548640" y="1234440"/>
+            <a:ext cx="11064240" cy="4937760"/>
           </a:xfrm>
           <a:prstGeom prst="rect">
             <a:avLst/>
@@ -9126,26 +10790,142 @@
           </a:bodyPr>
           <a:lstStyle/>
           <a:p>
-            <a:pPr>
-              <a:lnSpc>
-                <a:spcPts val="2200"/>
-              </a:lnSpc>
-            </a:pPr>
-            <a:r>
-              <a:rPr sz="1200" b="0">
+            <a:pPr lvl="0" marL="457200" indent="-228600">
+              <a:buFont typeface="Calibri"/>
+              <a:spcAft>
+                <a:spcPts val="1000"/>
+              </a:spcAft>
+              <a:buSzPct val="100000"/>
+              <a:buChar char="•"/>
+              <a:lnSpc>
+                <a:spcPts val="2200"/>
+              </a:lnSpc>
+            </a:pPr>
+            <a:r>
+              <a:rPr sz="2000" b="0">
                 <a:solidFill>
                   <a:srgbClr val="333333"/>
                 </a:solidFill>
                 <a:latin typeface="Calibri"/>
               </a:rPr>
-              <a:t>Aléatoire, graine 5 : ABC|DE, coupe 3</a:t>
-            </a:r>
-          </a:p>
-        </p:txBody>
-      </p:sp>
-      <p:sp>
-        <p:nvSpPr>
-          <p:cNvPr id="5" name="TextBox 4"/>
+              <a:t>Les labs quatre et cinq enseignent deux méthodes célèbres, appelées KL et FM</a:t>
+            </a:r>
+          </a:p>
+          <a:p>
+            <a:pPr lvl="0" marL="457200" indent="-228600">
+              <a:buFont typeface="Calibri"/>
+              <a:spcAft>
+                <a:spcPts val="1000"/>
+              </a:spcAft>
+              <a:buSzPct val="100000"/>
+              <a:buChar char="•"/>
+              <a:lnSpc>
+                <a:spcPts val="2200"/>
+              </a:lnSpc>
+            </a:pPr>
+            <a:r>
+              <a:rPr sz="2000" b="0">
+                <a:solidFill>
+                  <a:srgbClr val="333333"/>
+                </a:solidFill>
+                <a:latin typeface="Calibri"/>
+              </a:rPr>
+              <a:t>Elles améliorent une partition en déplaçant des cellules d'un côté à l'autre</a:t>
+            </a:r>
+          </a:p>
+          <a:p>
+            <a:pPr lvl="0" marL="457200" indent="-228600">
+              <a:buFont typeface="Calibri"/>
+              <a:spcAft>
+                <a:spcPts val="1000"/>
+              </a:spcAft>
+              <a:buSzPct val="100000"/>
+              <a:buChar char="•"/>
+              <a:lnSpc>
+                <a:spcPts val="2200"/>
+              </a:lnSpc>
+            </a:pPr>
+            <a:r>
+              <a:rPr sz="2000" b="0">
+                <a:solidFill>
+                  <a:srgbClr val="333333"/>
+                </a:solidFill>
+                <a:latin typeface="Calibri"/>
+              </a:rPr>
+              <a:t>Mais KL et FM ont besoin d'une partition valide pour démarrer</a:t>
+            </a:r>
+          </a:p>
+          <a:p>
+            <a:pPr lvl="0" marL="457200" indent="-228600">
+              <a:buFont typeface="Calibri"/>
+              <a:spcAft>
+                <a:spcPts val="1000"/>
+              </a:spcAft>
+              <a:buSzPct val="100000"/>
+              <a:buChar char="•"/>
+              <a:lnSpc>
+                <a:spcPts val="2200"/>
+              </a:lnSpc>
+            </a:pPr>
+            <a:r>
+              <a:rPr sz="2000" b="0">
+                <a:solidFill>
+                  <a:srgbClr val="333333"/>
+                </a:solidFill>
+                <a:latin typeface="Calibri"/>
+              </a:rPr>
+              <a:t>Pensez à former deux équipes : d'abord deux équipes au hasard, puis des échanges</a:t>
+            </a:r>
+          </a:p>
+          <a:p>
+            <a:pPr lvl="0" marL="457200" indent="-228600">
+              <a:buFont typeface="Calibri"/>
+              <a:spcAft>
+                <a:spcPts val="1000"/>
+              </a:spcAft>
+              <a:buSzPct val="100000"/>
+              <a:buChar char="•"/>
+              <a:lnSpc>
+                <a:spcPts val="2200"/>
+              </a:lnSpc>
+            </a:pPr>
+            <a:r>
+              <a:rPr sz="2000" b="0">
+                <a:solidFill>
+                  <a:srgbClr val="333333"/>
+                </a:solidFill>
+                <a:latin typeface="Calibri"/>
+              </a:rPr>
+              <a:t>Un bon premier découpage laisse moins d'échanges à faire</a:t>
+            </a:r>
+          </a:p>
+          <a:p>
+            <a:pPr lvl="0" marL="457200" indent="-228600">
+              <a:buFont typeface="Calibri"/>
+              <a:spcAft>
+                <a:spcPts val="1000"/>
+              </a:spcAft>
+              <a:buSzPct val="100000"/>
+              <a:buChar char="•"/>
+              <a:lnSpc>
+                <a:spcPts val="2200"/>
+              </a:lnSpc>
+            </a:pPr>
+            <a:r>
+              <a:rPr sz="2000" b="0">
+                <a:solidFill>
+                  <a:srgbClr val="333333"/>
+                </a:solidFill>
+                <a:latin typeface="Calibri"/>
+              </a:rPr>
+              <a:t>Faites une pause et devinez : le hasard peut-il aussi trouver une coupe de trois ?</a:t>
+            </a:r>
+          </a:p>
+        </p:txBody>
+      </p:sp>
+      <p:sp>
+        <p:nvSpPr>
+          <p:cNvPr id="4" name="TextBox 3"/>
           <p:cNvSpPr txBox="1"/>
           <p:nvPr/>
         </p:nvSpPr>
@@ -9234,14 +11014,14 @@
                 </a:solidFill>
                 <a:latin typeface="Calibri"/>
               </a:rPr>
-              <a:t>Glouton : ABC|DE, coupe 3</a:t>
+              <a:t>Trois façons de construire une première partition</a:t>
             </a:r>
           </a:p>
         </p:txBody>
       </p:sp>
       <p:pic>
         <p:nvPicPr>
-          <p:cNvPr id="3" name="Picture 2" descr="03-greedy.png"/>
+          <p:cNvPr id="3" name="Picture 2" descr="01-empty.png"/>
           <p:cNvPicPr>
             <a:picLocks noChangeAspect="1"/>
           </p:cNvPicPr>
@@ -9297,7 +11077,7 @@
                 </a:solidFill>
                 <a:latin typeface="Calibri"/>
               </a:rPr>
-              <a:t>Glouton : ABC|DE, coupe 3</a:t>
+              <a:t>Trois façons de construire une première partition</a:t>
             </a:r>
           </a:p>
         </p:txBody>
@@ -9393,14 +11173,14 @@
                 </a:solidFill>
                 <a:latin typeface="Calibri"/>
               </a:rPr>
-              <a:t>Croissance depuis D : ABC|DE, coupe 3</a:t>
+              <a:t>Aléatoire, graine 5 : ABC|DE, coupe 3</a:t>
             </a:r>
           </a:p>
         </p:txBody>
       </p:sp>
       <p:pic>
         <p:nvPicPr>
-          <p:cNvPr id="3" name="Picture 2" descr="04-grow-d.png"/>
+          <p:cNvPr id="3" name="Picture 2" descr="02-random-lucky.png"/>
           <p:cNvPicPr>
             <a:picLocks noChangeAspect="1"/>
           </p:cNvPicPr>
@@ -9456,7 +11236,7 @@
                 </a:solidFill>
                 <a:latin typeface="Calibri"/>
               </a:rPr>
-              <a:t>Croissance depuis D : ABC|DE, coupe 3</a:t>
+              <a:t>Aléatoire, graine 5 : ABC|DE, coupe 3</a:t>
             </a:r>
           </a:p>
         </p:txBody>
@@ -9552,14 +11332,14 @@
                 </a:solidFill>
                 <a:latin typeface="Calibri"/>
               </a:rPr>
-              <a:t>Essayer plusieurs départs, garder le meilleur</a:t>
+              <a:t>Glouton : ABC|DE, coupe 3</a:t>
             </a:r>
           </a:p>
         </p:txBody>
       </p:sp>
       <p:pic>
         <p:nvPicPr>
-          <p:cNvPr id="3" name="Picture 2" descr="05-takeaway.png"/>
+          <p:cNvPr id="3" name="Picture 2" descr="03-greedy.png"/>
           <p:cNvPicPr>
             <a:picLocks noChangeAspect="1"/>
           </p:cNvPicPr>
@@ -9615,7 +11395,7 @@
                 </a:solidFill>
                 <a:latin typeface="Calibri"/>
               </a:rPr>
-              <a:t>Essayer plusieurs départs, garder le meilleur</a:t>
+              <a:t>Glouton : ABC|DE, coupe 3</a:t>
             </a:r>
           </a:p>
         </p:txBody>
